--- a/docs/corporate-rag-presentation.pptx
+++ b/docs/corporate-rag-presentation.pptx
@@ -2,32 +2,32 @@
 <file path=ppt/presentation.xml><?xml version="1.0" encoding="utf-8"?>
 <p:presentation xmlns:p="http://schemas.openxmlformats.org/presentationml/2006/main">
   <p:sldMasterIdLst>
-    <p:sldMasterId xmlns:r="http://schemas.openxmlformats.org/officeDocument/2006/relationships" id="2147483648" r:id="R63a17613a91f48f4"/>
+    <p:sldMasterId xmlns:r="http://schemas.openxmlformats.org/officeDocument/2006/relationships" id="2147483648" r:id="R3c6120c8bff6460f"/>
   </p:sldMasterIdLst>
   <p:notesMasterIdLst>
-    <p:notesMasterId xmlns:r="http://schemas.openxmlformats.org/officeDocument/2006/relationships" r:id="Rafde5273c20946b1"/>
+    <p:notesMasterId xmlns:r="http://schemas.openxmlformats.org/officeDocument/2006/relationships" r:id="R3d2c640eefdc4c9d"/>
   </p:notesMasterIdLst>
   <p:sldIdLst>
-    <p:sldId xmlns:r="http://schemas.openxmlformats.org/officeDocument/2006/relationships" id="256" r:id="Rb2622117e8dd4c4f"/>
-    <p:sldId xmlns:r="http://schemas.openxmlformats.org/officeDocument/2006/relationships" id="257" r:id="R089144c8dff3411b"/>
-    <p:sldId xmlns:r="http://schemas.openxmlformats.org/officeDocument/2006/relationships" id="258" r:id="R523651be4dac4708"/>
-    <p:sldId xmlns:r="http://schemas.openxmlformats.org/officeDocument/2006/relationships" id="259" r:id="R82b2f528d07149ce"/>
-    <p:sldId xmlns:r="http://schemas.openxmlformats.org/officeDocument/2006/relationships" id="260" r:id="Rfdeb31f5c2274e31"/>
-    <p:sldId xmlns:r="http://schemas.openxmlformats.org/officeDocument/2006/relationships" id="261" r:id="Rab3be820dd8644c1"/>
-    <p:sldId xmlns:r="http://schemas.openxmlformats.org/officeDocument/2006/relationships" id="262" r:id="R2c9baacc1be8466b"/>
-    <p:sldId xmlns:r="http://schemas.openxmlformats.org/officeDocument/2006/relationships" id="263" r:id="Rf760997b44d04ae3"/>
-    <p:sldId xmlns:r="http://schemas.openxmlformats.org/officeDocument/2006/relationships" id="264" r:id="R9184008a7b6d4cec"/>
-    <p:sldId xmlns:r="http://schemas.openxmlformats.org/officeDocument/2006/relationships" id="265" r:id="Rd98b568b38384e26"/>
-    <p:sldId xmlns:r="http://schemas.openxmlformats.org/officeDocument/2006/relationships" id="266" r:id="R38fe300ae7334ba1"/>
-    <p:sldId xmlns:r="http://schemas.openxmlformats.org/officeDocument/2006/relationships" id="267" r:id="R292b59a4b9134cf0"/>
-    <p:sldId xmlns:r="http://schemas.openxmlformats.org/officeDocument/2006/relationships" id="268" r:id="R59be5fa6153145c4"/>
-    <p:sldId xmlns:r="http://schemas.openxmlformats.org/officeDocument/2006/relationships" id="269" r:id="R513ed46cc6234176"/>
-    <p:sldId xmlns:r="http://schemas.openxmlformats.org/officeDocument/2006/relationships" id="270" r:id="Rce68c1a5c5904f04"/>
-    <p:sldId xmlns:r="http://schemas.openxmlformats.org/officeDocument/2006/relationships" id="271" r:id="R7a07c9c644b34a18"/>
-    <p:sldId xmlns:r="http://schemas.openxmlformats.org/officeDocument/2006/relationships" id="272" r:id="R3396a5db9aab4f57"/>
-    <p:sldId xmlns:r="http://schemas.openxmlformats.org/officeDocument/2006/relationships" id="273" r:id="Rb2a017b1fee94cbf"/>
-    <p:sldId xmlns:r="http://schemas.openxmlformats.org/officeDocument/2006/relationships" id="274" r:id="R938680ec0f224da2"/>
-    <p:sldId xmlns:r="http://schemas.openxmlformats.org/officeDocument/2006/relationships" id="275" r:id="R0936eba4d6254e1c"/>
+    <p:sldId xmlns:r="http://schemas.openxmlformats.org/officeDocument/2006/relationships" id="256" r:id="Rb1127cf8027e4c0b"/>
+    <p:sldId xmlns:r="http://schemas.openxmlformats.org/officeDocument/2006/relationships" id="257" r:id="R7a26663bae704a76"/>
+    <p:sldId xmlns:r="http://schemas.openxmlformats.org/officeDocument/2006/relationships" id="258" r:id="Rb944e890fdee4657"/>
+    <p:sldId xmlns:r="http://schemas.openxmlformats.org/officeDocument/2006/relationships" id="259" r:id="R42587215cdc246ff"/>
+    <p:sldId xmlns:r="http://schemas.openxmlformats.org/officeDocument/2006/relationships" id="260" r:id="R034945ee5ea740fc"/>
+    <p:sldId xmlns:r="http://schemas.openxmlformats.org/officeDocument/2006/relationships" id="261" r:id="R1e7bfe3a945d49b4"/>
+    <p:sldId xmlns:r="http://schemas.openxmlformats.org/officeDocument/2006/relationships" id="262" r:id="Rb6bad8988aec401d"/>
+    <p:sldId xmlns:r="http://schemas.openxmlformats.org/officeDocument/2006/relationships" id="263" r:id="Rdee394515da04459"/>
+    <p:sldId xmlns:r="http://schemas.openxmlformats.org/officeDocument/2006/relationships" id="264" r:id="R973ce2dbbe204763"/>
+    <p:sldId xmlns:r="http://schemas.openxmlformats.org/officeDocument/2006/relationships" id="265" r:id="R5c620561fff04a45"/>
+    <p:sldId xmlns:r="http://schemas.openxmlformats.org/officeDocument/2006/relationships" id="266" r:id="Rb923742de4b143d5"/>
+    <p:sldId xmlns:r="http://schemas.openxmlformats.org/officeDocument/2006/relationships" id="267" r:id="Rc373f2026c09426b"/>
+    <p:sldId xmlns:r="http://schemas.openxmlformats.org/officeDocument/2006/relationships" id="268" r:id="R97e5b3902cdc46b7"/>
+    <p:sldId xmlns:r="http://schemas.openxmlformats.org/officeDocument/2006/relationships" id="269" r:id="Ra7bd1dea1f0f49fd"/>
+    <p:sldId xmlns:r="http://schemas.openxmlformats.org/officeDocument/2006/relationships" id="270" r:id="R3944ab81489f42b6"/>
+    <p:sldId xmlns:r="http://schemas.openxmlformats.org/officeDocument/2006/relationships" id="271" r:id="Rd0eb8dbe1ec84cd4"/>
+    <p:sldId xmlns:r="http://schemas.openxmlformats.org/officeDocument/2006/relationships" id="272" r:id="R0d92e0f61b0c4e2a"/>
+    <p:sldId xmlns:r="http://schemas.openxmlformats.org/officeDocument/2006/relationships" id="273" r:id="R75753a1465e04dad"/>
+    <p:sldId xmlns:r="http://schemas.openxmlformats.org/officeDocument/2006/relationships" id="274" r:id="Rc5b570dd535e4437"/>
+    <p:sldId xmlns:r="http://schemas.openxmlformats.org/officeDocument/2006/relationships" id="275" r:id="R750154e3ac6f46e9"/>
   </p:sldIdLst>
   <p:sldSz cx="15240000" cy="8572500"/>
   <p:notesSz cx="6858000" cy="9144000"/>
@@ -2119,7 +2119,7 @@
   </p:cSld>
   <p:clrMap bg1="lt1" tx1="dk1" bg2="lt2" tx2="dk2" accent1="accent1" accent2="accent2" accent3="accent3" accent4="accent4" accent5="accent5" accent6="accent6" hlink="hlink" folHlink="folHlink"/>
   <p:sldLayoutIdLst>
-    <p:sldLayoutId xmlns:r="http://schemas.openxmlformats.org/officeDocument/2006/relationships" id="2147483649" r:id="R4f8e1bc967c045fc"/>
+    <p:sldLayoutId xmlns:r="http://schemas.openxmlformats.org/officeDocument/2006/relationships" id="2147483649" r:id="R3b077975d85845a7"/>
   </p:sldLayoutIdLst>
   <p:txStyles>
     <p:titleStyle>
@@ -2778,6 +2778,7 @@
               <a:spcAft>
                 <a:spcPts val="0"/>
               </a:spcAft>
+              <a:buNone/>
               <a:defRPr sz="1125" b="1">
                 <a:solidFill>
                   <a:srgbClr val="A4B8C9"/>
@@ -2842,6 +2843,7 @@
               <a:spcAft>
                 <a:spcPts val="0"/>
               </a:spcAft>
+              <a:buNone/>
               <a:defRPr sz="1275" b="0">
                 <a:solidFill>
                   <a:srgbClr val="A4B8C9"/>
@@ -2906,6 +2908,7 @@
               <a:spcAft>
                 <a:spcPts val="0"/>
               </a:spcAft>
+              <a:buNone/>
               <a:defRPr sz="1350" b="1">
                 <a:solidFill>
                   <a:srgbClr val="54D7FF"/>
@@ -2924,7 +2927,7 @@
                 <a:ea typeface="Arial"/>
                 <a:cs typeface="Arial"/>
               </a:rPr>
-              <a:t>300+ МИКРОСЕРВИСОВ · SDD · ЕДИНЫЙ КОНТЕКСТ</a:t>
+              <a:t>КОРПОРАТИВНАЯ РАЗРАБОТКА · RAG · SDD</a:t>
             </a:r>
           </a:p>
         </p:txBody>
@@ -2988,7 +2991,7 @@
                 <a:ea typeface="Arial"/>
                 <a:cs typeface="Arial"/>
               </a:rPr>
-              <a:t>Как общий контекст в RAG</a:t>
+              <a:t>Применение RAG</a:t>
             </a:r>
           </a:p>
           <a:p xmlns:a="http://schemas.openxmlformats.org/drawingml/2006/main">
@@ -3017,7 +3020,7 @@
                 <a:ea typeface="Arial"/>
                 <a:cs typeface="Arial"/>
               </a:rPr>
-              <a:t>помогает разработке АС по SDD</a:t>
+              <a:t>в SDD-разработке АС</a:t>
             </a:r>
           </a:p>
           <a:p xmlns:a="http://schemas.openxmlformats.org/drawingml/2006/main">
@@ -3040,24 +3043,13 @@
             <a:r>
               <a:rPr sz="5475" b="1">
                 <a:solidFill>
-                  <a:srgbClr val="F4F8FB"/>
-                </a:solidFill>
-                <a:latin typeface="Arial"/>
-                <a:ea typeface="Arial"/>
-                <a:cs typeface="Arial"/>
-              </a:rPr>
-              <a:t>с </a:t>
-            </a:r>
-            <a:r>
-              <a:rPr sz="5475" b="1">
-                <a:solidFill>
                   <a:srgbClr val="54D7FF"/>
                 </a:solidFill>
                 <a:latin typeface="Arial"/>
                 <a:ea typeface="Arial"/>
                 <a:cs typeface="Arial"/>
               </a:rPr>
-              <a:t>300+ микросервисами</a:t>
+              <a:t>с 300+ микросервисами</a:t>
             </a:r>
           </a:p>
         </p:txBody>
@@ -3165,6 +3157,7 @@
               <a:spcAft>
                 <a:spcPts val="0"/>
               </a:spcAft>
+              <a:buNone/>
               <a:defRPr sz="2325" b="0">
                 <a:solidFill>
                   <a:srgbClr val="A4B8C9"/>
@@ -3229,6 +3222,7 @@
               <a:spcAft>
                 <a:spcPts val="0"/>
               </a:spcAft>
+              <a:buNone/>
               <a:defRPr sz="1650" b="0">
                 <a:solidFill>
                   <a:srgbClr val="A4B8C9"/>
@@ -3394,6 +3388,7 @@
               <a:spcAft>
                 <a:spcPts val="0"/>
               </a:spcAft>
+              <a:buNone/>
               <a:defRPr sz="1125" b="1">
                 <a:solidFill>
                   <a:srgbClr val="A4B8C9"/>
@@ -3458,6 +3453,7 @@
               <a:spcAft>
                 <a:spcPts val="0"/>
               </a:spcAft>
+              <a:buNone/>
               <a:defRPr sz="1275" b="0">
                 <a:solidFill>
                   <a:srgbClr val="A4B8C9"/>
@@ -3522,6 +3518,7 @@
               <a:spcAft>
                 <a:spcPts val="0"/>
               </a:spcAft>
+              <a:buNone/>
               <a:defRPr sz="1350" b="1">
                 <a:solidFill>
                   <a:srgbClr val="54D7FF"/>
@@ -3604,8 +3601,26 @@
                 <a:ea typeface="Arial"/>
                 <a:cs typeface="Arial"/>
               </a:rPr>
-              <a:t>Вопрос и документ переводятся </a:t>
-            </a:r>
+              <a:t>Векторизация запроса</a:t>
+            </a:r>
+          </a:p>
+          <a:p xmlns:a="http://schemas.openxmlformats.org/drawingml/2006/main">
+            <a:pPr algn="l">
+              <a:spcBef>
+                <a:spcPts val="0"/>
+              </a:spcBef>
+              <a:spcAft>
+                <a:spcPts val="0"/>
+              </a:spcAft>
+              <a:defRPr sz="4050" b="1">
+                <a:solidFill>
+                  <a:srgbClr val="F4F8FB"/>
+                </a:solidFill>
+                <a:latin typeface="Arial"/>
+                <a:ea typeface="Arial"/>
+                <a:cs typeface="Arial"/>
+              </a:defRPr>
+            </a:pPr>
             <a:r>
               <a:rPr sz="4050" b="1">
                 <a:solidFill>
@@ -3615,36 +3630,7 @@
                 <a:ea typeface="Arial"/>
                 <a:cs typeface="Arial"/>
               </a:rPr>
-              <a:t>одним provider'ом.</a:t>
-            </a:r>
-          </a:p>
-          <a:p xmlns:a="http://schemas.openxmlformats.org/drawingml/2006/main">
-            <a:pPr algn="l">
-              <a:spcBef>
-                <a:spcPts val="0"/>
-              </a:spcBef>
-              <a:spcAft>
-                <a:spcPts val="0"/>
-              </a:spcAft>
-              <a:defRPr sz="4050" b="1">
-                <a:solidFill>
-                  <a:srgbClr val="F4F8FB"/>
-                </a:solidFill>
-                <a:latin typeface="Arial"/>
-                <a:ea typeface="Arial"/>
-                <a:cs typeface="Arial"/>
-              </a:defRPr>
-            </a:pPr>
-            <a:r>
-              <a:rPr sz="4050" b="1">
-                <a:solidFill>
-                  <a:srgbClr val="F4F8FB"/>
-                </a:solidFill>
-                <a:latin typeface="Arial"/>
-                <a:ea typeface="Arial"/>
-                <a:cs typeface="Arial"/>
-              </a:rPr>
-              <a:t>Дальше — обычная математика.</a:t>
+              <a:t>и поиск релевантных фрагментов</a:t>
             </a:r>
           </a:p>
         </p:txBody>
@@ -3787,6 +3773,7 @@
               <a:spcAft>
                 <a:spcPts val="0"/>
               </a:spcAft>
+              <a:buNone/>
               <a:defRPr sz="2400" b="1">
                 <a:solidFill>
                   <a:srgbClr val="54D7FF"/>
@@ -3851,6 +3838,7 @@
               <a:spcAft>
                 <a:spcPts val="0"/>
               </a:spcAft>
+              <a:buNone/>
               <a:defRPr sz="2025" b="0">
                 <a:solidFill>
                   <a:srgbClr val="F4F8FB"/>
@@ -3915,6 +3903,7 @@
               <a:spcAft>
                 <a:spcPts val="0"/>
               </a:spcAft>
+              <a:buNone/>
               <a:defRPr sz="1725" b="0">
                 <a:solidFill>
                   <a:srgbClr val="A4B8C9"/>
@@ -4014,6 +4003,7 @@
               <a:spcAft>
                 <a:spcPts val="0"/>
               </a:spcAft>
+              <a:buNone/>
               <a:defRPr sz="2400" b="1">
                 <a:solidFill>
                   <a:srgbClr val="AF98FF"/>
@@ -4078,6 +4068,7 @@
               <a:spcAft>
                 <a:spcPts val="0"/>
               </a:spcAft>
+              <a:buNone/>
               <a:defRPr sz="2025" b="0">
                 <a:solidFill>
                   <a:srgbClr val="F4F8FB"/>
@@ -4142,6 +4133,7 @@
               <a:spcAft>
                 <a:spcPts val="0"/>
               </a:spcAft>
+              <a:buNone/>
               <a:defRPr sz="1725" b="0">
                 <a:solidFill>
                   <a:srgbClr val="A4B8C9"/>
@@ -4241,6 +4233,7 @@
               <a:spcAft>
                 <a:spcPts val="0"/>
               </a:spcAft>
+              <a:buNone/>
               <a:defRPr sz="2400" b="1">
                 <a:solidFill>
                   <a:srgbClr val="5CE3A0"/>
@@ -4305,6 +4298,7 @@
               <a:spcAft>
                 <a:spcPts val="0"/>
               </a:spcAft>
+              <a:buNone/>
               <a:defRPr sz="2025" b="0">
                 <a:solidFill>
                   <a:srgbClr val="F4F8FB"/>
@@ -4369,6 +4363,7 @@
               <a:spcAft>
                 <a:spcPts val="0"/>
               </a:spcAft>
+              <a:buNone/>
               <a:defRPr sz="1725" b="0">
                 <a:solidFill>
                   <a:srgbClr val="A4B8C9"/>
@@ -4486,6 +4481,7 @@
               <a:spcAft>
                 <a:spcPts val="0"/>
               </a:spcAft>
+              <a:buNone/>
               <a:defRPr sz="1800" b="0">
                 <a:solidFill>
                   <a:srgbClr val="A4B8C9"/>
@@ -4662,6 +4658,7 @@
               <a:spcAft>
                 <a:spcPts val="0"/>
               </a:spcAft>
+              <a:buNone/>
               <a:defRPr sz="1125" b="1">
                 <a:solidFill>
                   <a:srgbClr val="A4B8C9"/>
@@ -4726,6 +4723,7 @@
               <a:spcAft>
                 <a:spcPts val="0"/>
               </a:spcAft>
+              <a:buNone/>
               <a:defRPr sz="1275" b="0">
                 <a:solidFill>
                   <a:srgbClr val="A4B8C9"/>
@@ -4790,6 +4788,7 @@
               <a:spcAft>
                 <a:spcPts val="0"/>
               </a:spcAft>
+              <a:buNone/>
               <a:defRPr sz="1350" b="1">
                 <a:solidFill>
                   <a:srgbClr val="54D7FF"/>
@@ -4808,7 +4807,7 @@
                 <a:ea typeface="Arial"/>
                 <a:cs typeface="Arial"/>
               </a:rPr>
-              <a:t>КАК СТРОИТСЯ ГРАФ СИСТЕМЫ</a:t>
+              <a:t>ГРАФ СИСТЕМЫ</a:t>
             </a:r>
           </a:p>
         </p:txBody>
@@ -4872,7 +4871,7 @@
                 <a:ea typeface="Arial"/>
                 <a:cs typeface="Arial"/>
               </a:rPr>
-              <a:t>Граф строится из связей в системе,</a:t>
+              <a:t>Построение графа</a:t>
             </a:r>
           </a:p>
           <a:p xmlns:a="http://schemas.openxmlformats.org/drawingml/2006/main">
@@ -4895,24 +4894,13 @@
             <a:r>
               <a:rPr sz="4050" b="1">
                 <a:solidFill>
-                  <a:srgbClr val="F4F8FB"/>
-                </a:solidFill>
-                <a:latin typeface="Arial"/>
-                <a:ea typeface="Arial"/>
-                <a:cs typeface="Arial"/>
-              </a:rPr>
-              <a:t>а не </a:t>
-            </a:r>
-            <a:r>
-              <a:rPr sz="4050" b="1">
-                <a:solidFill>
                   <a:srgbClr val="AF98FF"/>
                 </a:solidFill>
                 <a:latin typeface="Arial"/>
                 <a:ea typeface="Arial"/>
                 <a:cs typeface="Arial"/>
               </a:rPr>
-              <a:t>из догадок модели.</a:t>
+              <a:t>межсервисных связей</a:t>
             </a:r>
           </a:p>
         </p:txBody>
@@ -5082,6 +5070,7 @@
               <a:spcAft>
                 <a:spcPts val="0"/>
               </a:spcAft>
+              <a:buNone/>
               <a:defRPr sz="2475" b="1">
                 <a:solidFill>
                   <a:srgbClr val="F4F8FB"/>
@@ -5111,6 +5100,7 @@
               <a:spcAft>
                 <a:spcPts val="0"/>
               </a:spcAft>
+              <a:buNone/>
               <a:defRPr sz="2475" b="1">
                 <a:solidFill>
                   <a:srgbClr val="F4F8FB"/>
@@ -5175,6 +5165,7 @@
               <a:spcAft>
                 <a:spcPts val="0"/>
               </a:spcAft>
+              <a:buNone/>
               <a:defRPr sz="1875" b="0">
                 <a:solidFill>
                   <a:srgbClr val="A4B8C9"/>
@@ -5270,6 +5261,7 @@
               <a:spcAft>
                 <a:spcPts val="0"/>
               </a:spcAft>
+              <a:buNone/>
               <a:defRPr sz="2475" b="1">
                 <a:solidFill>
                   <a:srgbClr val="F4F8FB"/>
@@ -5299,6 +5291,7 @@
               <a:spcAft>
                 <a:spcPts val="0"/>
               </a:spcAft>
+              <a:buNone/>
               <a:defRPr sz="2475" b="1">
                 <a:solidFill>
                   <a:srgbClr val="F4F8FB"/>
@@ -5363,6 +5356,7 @@
               <a:spcAft>
                 <a:spcPts val="0"/>
               </a:spcAft>
+              <a:buNone/>
               <a:defRPr sz="1875" b="0">
                 <a:solidFill>
                   <a:srgbClr val="A4B8C9"/>
@@ -5458,6 +5452,7 @@
               <a:spcAft>
                 <a:spcPts val="0"/>
               </a:spcAft>
+              <a:buNone/>
               <a:defRPr sz="2475" b="1">
                 <a:solidFill>
                   <a:srgbClr val="F4F8FB"/>
@@ -5487,6 +5482,7 @@
               <a:spcAft>
                 <a:spcPts val="0"/>
               </a:spcAft>
+              <a:buNone/>
               <a:defRPr sz="2475" b="1">
                 <a:solidFill>
                   <a:srgbClr val="F4F8FB"/>
@@ -5551,6 +5547,7 @@
               <a:spcAft>
                 <a:spcPts val="0"/>
               </a:spcAft>
+              <a:buNone/>
               <a:defRPr sz="1875" b="0">
                 <a:solidFill>
                   <a:srgbClr val="A4B8C9"/>
@@ -5646,6 +5643,7 @@
               <a:spcAft>
                 <a:spcPts val="0"/>
               </a:spcAft>
+              <a:buNone/>
               <a:defRPr sz="2475" b="1">
                 <a:solidFill>
                   <a:srgbClr val="F4F8FB"/>
@@ -5675,6 +5673,7 @@
               <a:spcAft>
                 <a:spcPts val="0"/>
               </a:spcAft>
+              <a:buNone/>
               <a:defRPr sz="2475" b="1">
                 <a:solidFill>
                   <a:srgbClr val="F4F8FB"/>
@@ -5739,6 +5738,7 @@
               <a:spcAft>
                 <a:spcPts val="0"/>
               </a:spcAft>
+              <a:buNone/>
               <a:defRPr sz="1875" b="0">
                 <a:solidFill>
                   <a:srgbClr val="A4B8C9"/>
@@ -5834,6 +5834,7 @@
               <a:spcAft>
                 <a:spcPts val="0"/>
               </a:spcAft>
+              <a:buNone/>
               <a:defRPr sz="1800" b="0">
                 <a:solidFill>
                   <a:srgbClr val="A4B8C9"/>
@@ -6010,6 +6011,7 @@
               <a:spcAft>
                 <a:spcPts val="0"/>
               </a:spcAft>
+              <a:buNone/>
               <a:defRPr sz="1125" b="1">
                 <a:solidFill>
                   <a:srgbClr val="A4B8C9"/>
@@ -6074,6 +6076,7 @@
               <a:spcAft>
                 <a:spcPts val="0"/>
               </a:spcAft>
+              <a:buNone/>
               <a:defRPr sz="1275" b="0">
                 <a:solidFill>
                   <a:srgbClr val="A4B8C9"/>
@@ -6138,6 +6141,7 @@
               <a:spcAft>
                 <a:spcPts val="0"/>
               </a:spcAft>
+              <a:buNone/>
               <a:defRPr sz="1350" b="1">
                 <a:solidFill>
                   <a:srgbClr val="54D7FF"/>
@@ -6156,7 +6160,7 @@
                 <a:ea typeface="Arial"/>
                 <a:cs typeface="Arial"/>
               </a:rPr>
-              <a:t>БЫСТРЫЙ РЕЖИМ ПОСТРОЕНИЯ</a:t>
+              <a:t>СТАТИЧЕСКИЙ АНАЛИЗ</a:t>
             </a:r>
           </a:p>
         </p:txBody>
@@ -6220,8 +6224,26 @@
                 <a:ea typeface="Arial"/>
                 <a:cs typeface="Arial"/>
               </a:rPr>
-              <a:t>Базовый граф читается </a:t>
-            </a:r>
+              <a:t>Статический анализ репозиториев</a:t>
+            </a:r>
+          </a:p>
+          <a:p xmlns:a="http://schemas.openxmlformats.org/drawingml/2006/main">
+            <a:pPr algn="l">
+              <a:spcBef>
+                <a:spcPts val="0"/>
+              </a:spcBef>
+              <a:spcAft>
+                <a:spcPts val="0"/>
+              </a:spcAft>
+              <a:defRPr sz="4050" b="1">
+                <a:solidFill>
+                  <a:srgbClr val="F4F8FB"/>
+                </a:solidFill>
+                <a:latin typeface="Arial"/>
+                <a:ea typeface="Arial"/>
+                <a:cs typeface="Arial"/>
+              </a:defRPr>
+            </a:pPr>
             <a:r>
               <a:rPr sz="4050" b="1">
                 <a:solidFill>
@@ -6231,36 +6253,7 @@
                 <a:ea typeface="Arial"/>
                 <a:cs typeface="Arial"/>
               </a:rPr>
-              <a:t>из репозиториев.</a:t>
-            </a:r>
-          </a:p>
-          <a:p xmlns:a="http://schemas.openxmlformats.org/drawingml/2006/main">
-            <a:pPr algn="l">
-              <a:spcBef>
-                <a:spcPts val="0"/>
-              </a:spcBef>
-              <a:spcAft>
-                <a:spcPts val="0"/>
-              </a:spcAft>
-              <a:defRPr sz="4050" b="1">
-                <a:solidFill>
-                  <a:srgbClr val="F4F8FB"/>
-                </a:solidFill>
-                <a:latin typeface="Arial"/>
-                <a:ea typeface="Arial"/>
-                <a:cs typeface="Arial"/>
-              </a:defRPr>
-            </a:pPr>
-            <a:r>
-              <a:rPr sz="4050" b="1">
-                <a:solidFill>
-                  <a:srgbClr val="F4F8FB"/>
-                </a:solidFill>
-                <a:latin typeface="Arial"/>
-                <a:ea typeface="Arial"/>
-                <a:cs typeface="Arial"/>
-              </a:rPr>
-              <a:t>Сервисы запускать не нужно.</a:t>
+              <a:t>для построения графа</a:t>
             </a:r>
           </a:p>
         </p:txBody>
@@ -6337,6 +6330,7 @@
               <a:spcAft>
                 <a:spcPts val="0"/>
               </a:spcAft>
+              <a:buNone/>
               <a:defRPr sz="2475" b="1">
                 <a:solidFill>
                   <a:srgbClr val="F4F8FB"/>
@@ -6401,6 +6395,7 @@
               <a:spcAft>
                 <a:spcPts val="0"/>
               </a:spcAft>
+              <a:buNone/>
               <a:defRPr sz="1950" b="0">
                 <a:solidFill>
                   <a:srgbClr val="A4B8C9"/>
@@ -6518,6 +6513,7 @@
               <a:spcAft>
                 <a:spcPts val="0"/>
               </a:spcAft>
+              <a:buNone/>
               <a:defRPr sz="2475" b="1">
                 <a:solidFill>
                   <a:srgbClr val="F4F8FB"/>
@@ -6582,6 +6578,7 @@
               <a:spcAft>
                 <a:spcPts val="0"/>
               </a:spcAft>
+              <a:buNone/>
               <a:defRPr sz="1950" b="0">
                 <a:solidFill>
                   <a:srgbClr val="A4B8C9"/>
@@ -6677,6 +6674,7 @@
               <a:spcAft>
                 <a:spcPts val="0"/>
               </a:spcAft>
+              <a:buNone/>
               <a:defRPr sz="2475" b="1">
                 <a:solidFill>
                   <a:srgbClr val="F4F8FB"/>
@@ -6741,6 +6739,7 @@
               <a:spcAft>
                 <a:spcPts val="0"/>
               </a:spcAft>
+              <a:buNone/>
               <a:defRPr sz="1950" b="0">
                 <a:solidFill>
                   <a:srgbClr val="A4B8C9"/>
@@ -6836,6 +6835,7 @@
               <a:spcAft>
                 <a:spcPts val="0"/>
               </a:spcAft>
+              <a:buNone/>
               <a:defRPr sz="1800" b="0">
                 <a:solidFill>
                   <a:srgbClr val="A4B8C9"/>
@@ -7012,6 +7012,7 @@
               <a:spcAft>
                 <a:spcPts val="0"/>
               </a:spcAft>
+              <a:buNone/>
               <a:defRPr sz="1125" b="1">
                 <a:solidFill>
                   <a:srgbClr val="A4B8C9"/>
@@ -7076,6 +7077,7 @@
               <a:spcAft>
                 <a:spcPts val="0"/>
               </a:spcAft>
+              <a:buNone/>
               <a:defRPr sz="1275" b="0">
                 <a:solidFill>
                   <a:srgbClr val="A4B8C9"/>
@@ -7140,6 +7142,7 @@
               <a:spcAft>
                 <a:spcPts val="0"/>
               </a:spcAft>
+              <a:buNone/>
               <a:defRPr sz="1350" b="1">
                 <a:solidFill>
                   <a:srgbClr val="54D7FF"/>
@@ -7158,7 +7161,7 @@
                 <a:ea typeface="Arial"/>
                 <a:cs typeface="Arial"/>
               </a:rPr>
-              <a:t>КАК ИЗВЛЕКАЮТСЯ СВЯЗИ</a:t>
+              <a:t>СОПОСТАВЛЕНИЕ КОНТРАКТОВ</a:t>
             </a:r>
           </a:p>
         </p:txBody>
@@ -7222,7 +7225,7 @@
                 <a:ea typeface="Arial"/>
                 <a:cs typeface="Arial"/>
               </a:rPr>
-              <a:t>Ребро появляется не «по похожему имени».</a:t>
+              <a:t>Выявление межсервисных связей</a:t>
             </a:r>
           </a:p>
           <a:p xmlns:a="http://schemas.openxmlformats.org/drawingml/2006/main">
@@ -7245,24 +7248,13 @@
             <a:r>
               <a:rPr sz="4050" b="1">
                 <a:solidFill>
-                  <a:srgbClr val="F4F8FB"/>
-                </a:solidFill>
-                <a:latin typeface="Arial"/>
-                <a:ea typeface="Arial"/>
-                <a:cs typeface="Arial"/>
-              </a:rPr>
-              <a:t>Его нужно </a:t>
-            </a:r>
-            <a:r>
-              <a:rPr sz="4050" b="1">
-                <a:solidFill>
                   <a:srgbClr val="54D7FF"/>
                 </a:solidFill>
                 <a:latin typeface="Arial"/>
                 <a:ea typeface="Arial"/>
                 <a:cs typeface="Arial"/>
               </a:rPr>
-              <a:t>сопоставить с контрактом.</a:t>
+              <a:t>по коду и контрактам</a:t>
             </a:r>
           </a:p>
         </p:txBody>
@@ -7432,6 +7424,7 @@
               <a:spcAft>
                 <a:spcPts val="0"/>
               </a:spcAft>
+              <a:buNone/>
               <a:defRPr sz="2475" b="1">
                 <a:solidFill>
                   <a:srgbClr val="F4F8FB"/>
@@ -7461,6 +7454,7 @@
               <a:spcAft>
                 <a:spcPts val="0"/>
               </a:spcAft>
+              <a:buNone/>
               <a:defRPr sz="2475" b="1">
                 <a:solidFill>
                   <a:srgbClr val="F4F8FB"/>
@@ -7525,6 +7519,7 @@
               <a:spcAft>
                 <a:spcPts val="0"/>
               </a:spcAft>
+              <a:buNone/>
               <a:defRPr sz="1875" b="0">
                 <a:solidFill>
                   <a:srgbClr val="A4B8C9"/>
@@ -7620,6 +7615,7 @@
               <a:spcAft>
                 <a:spcPts val="0"/>
               </a:spcAft>
+              <a:buNone/>
               <a:defRPr sz="2475" b="1">
                 <a:solidFill>
                   <a:srgbClr val="F4F8FB"/>
@@ -7649,6 +7645,7 @@
               <a:spcAft>
                 <a:spcPts val="0"/>
               </a:spcAft>
+              <a:buNone/>
               <a:defRPr sz="2475" b="1">
                 <a:solidFill>
                   <a:srgbClr val="F4F8FB"/>
@@ -7713,6 +7710,7 @@
               <a:spcAft>
                 <a:spcPts val="0"/>
               </a:spcAft>
+              <a:buNone/>
               <a:defRPr sz="1875" b="0">
                 <a:solidFill>
                   <a:srgbClr val="A4B8C9"/>
@@ -7808,6 +7806,7 @@
               <a:spcAft>
                 <a:spcPts val="0"/>
               </a:spcAft>
+              <a:buNone/>
               <a:defRPr sz="2475" b="1">
                 <a:solidFill>
                   <a:srgbClr val="F4F8FB"/>
@@ -7837,6 +7836,7 @@
               <a:spcAft>
                 <a:spcPts val="0"/>
               </a:spcAft>
+              <a:buNone/>
               <a:defRPr sz="2475" b="1">
                 <a:solidFill>
                   <a:srgbClr val="F4F8FB"/>
@@ -7901,6 +7901,7 @@
               <a:spcAft>
                 <a:spcPts val="0"/>
               </a:spcAft>
+              <a:buNone/>
               <a:defRPr sz="1875" b="0">
                 <a:solidFill>
                   <a:srgbClr val="A4B8C9"/>
@@ -7930,6 +7931,7 @@
               <a:spcAft>
                 <a:spcPts val="0"/>
               </a:spcAft>
+              <a:buNone/>
               <a:defRPr sz="1875" b="0">
                 <a:solidFill>
                   <a:srgbClr val="A4B8C9"/>
@@ -8025,6 +8027,7 @@
               <a:spcAft>
                 <a:spcPts val="0"/>
               </a:spcAft>
+              <a:buNone/>
               <a:defRPr sz="2475" b="1">
                 <a:solidFill>
                   <a:srgbClr val="F4F8FB"/>
@@ -8054,6 +8057,7 @@
               <a:spcAft>
                 <a:spcPts val="0"/>
               </a:spcAft>
+              <a:buNone/>
               <a:defRPr sz="2475" b="1">
                 <a:solidFill>
                   <a:srgbClr val="F4F8FB"/>
@@ -8118,6 +8122,7 @@
               <a:spcAft>
                 <a:spcPts val="0"/>
               </a:spcAft>
+              <a:buNone/>
               <a:defRPr sz="1875" b="0">
                 <a:solidFill>
                   <a:srgbClr val="A4B8C9"/>
@@ -8213,6 +8218,7 @@
               <a:spcAft>
                 <a:spcPts val="0"/>
               </a:spcAft>
+              <a:buNone/>
               <a:defRPr sz="1800" b="0">
                 <a:solidFill>
                   <a:srgbClr val="A4B8C9"/>
@@ -8389,6 +8395,7 @@
               <a:spcAft>
                 <a:spcPts val="0"/>
               </a:spcAft>
+              <a:buNone/>
               <a:defRPr sz="1125" b="1">
                 <a:solidFill>
                   <a:srgbClr val="A4B8C9"/>
@@ -8453,6 +8460,7 @@
               <a:spcAft>
                 <a:spcPts val="0"/>
               </a:spcAft>
+              <a:buNone/>
               <a:defRPr sz="1275" b="0">
                 <a:solidFill>
                   <a:srgbClr val="A4B8C9"/>
@@ -8517,6 +8525,7 @@
               <a:spcAft>
                 <a:spcPts val="0"/>
               </a:spcAft>
+              <a:buNone/>
               <a:defRPr sz="1350" b="1">
                 <a:solidFill>
                   <a:srgbClr val="54D7FF"/>
@@ -8535,7 +8544,7 @@
                 <a:ea typeface="Arial"/>
                 <a:cs typeface="Arial"/>
               </a:rPr>
-              <a:t>ГРАНИЦЫ ТОЧНОСТИ</a:t>
+              <a:t>ДОСТОВЕРНОСТЬ ГРАФА</a:t>
             </a:r>
           </a:p>
         </p:txBody>
@@ -8599,7 +8608,7 @@
                 <a:ea typeface="Arial"/>
                 <a:cs typeface="Arial"/>
               </a:rPr>
-              <a:t>Граф не скрывает сомнения.</a:t>
+              <a:t>Уровни достоверности</a:t>
             </a:r>
           </a:p>
           <a:p xmlns:a="http://schemas.openxmlformats.org/drawingml/2006/main">
@@ -8628,18 +8637,7 @@
                 <a:ea typeface="Arial"/>
                 <a:cs typeface="Arial"/>
               </a:rPr>
-              <a:t>Неизвестное</a:t>
-            </a:r>
-            <a:r>
-              <a:rPr sz="4050" b="1">
-                <a:solidFill>
-                  <a:srgbClr val="F4F8FB"/>
-                </a:solidFill>
-                <a:latin typeface="Arial"/>
-                <a:ea typeface="Arial"/>
-                <a:cs typeface="Arial"/>
-              </a:rPr>
-              <a:t> тоже становится результатом.</a:t>
+              <a:t>и неразрешённые связи графа</a:t>
             </a:r>
           </a:p>
         </p:txBody>
@@ -8716,6 +8714,7 @@
               <a:spcAft>
                 <a:spcPts val="0"/>
               </a:spcAft>
+              <a:buNone/>
               <a:defRPr sz="2475" b="1">
                 <a:solidFill>
                   <a:srgbClr val="F4F8FB"/>
@@ -8780,6 +8779,7 @@
               <a:spcAft>
                 <a:spcPts val="0"/>
               </a:spcAft>
+              <a:buNone/>
               <a:defRPr sz="1950" b="0">
                 <a:solidFill>
                   <a:srgbClr val="A4B8C9"/>
@@ -8875,6 +8875,7 @@
               <a:spcAft>
                 <a:spcPts val="0"/>
               </a:spcAft>
+              <a:buNone/>
               <a:defRPr sz="2475" b="1">
                 <a:solidFill>
                   <a:srgbClr val="F4F8FB"/>
@@ -8939,6 +8940,7 @@
               <a:spcAft>
                 <a:spcPts val="0"/>
               </a:spcAft>
+              <a:buNone/>
               <a:defRPr sz="1950" b="0">
                 <a:solidFill>
                   <a:srgbClr val="A4B8C9"/>
@@ -9034,6 +9036,7 @@
               <a:spcAft>
                 <a:spcPts val="0"/>
               </a:spcAft>
+              <a:buNone/>
               <a:defRPr sz="2475" b="1">
                 <a:solidFill>
                   <a:srgbClr val="F4F8FB"/>
@@ -9098,6 +9101,7 @@
               <a:spcAft>
                 <a:spcPts val="0"/>
               </a:spcAft>
+              <a:buNone/>
               <a:defRPr sz="1950" b="0">
                 <a:solidFill>
                   <a:srgbClr val="A4B8C9"/>
@@ -9193,6 +9197,7 @@
               <a:spcAft>
                 <a:spcPts val="0"/>
               </a:spcAft>
+              <a:buNone/>
               <a:defRPr sz="1800" b="0">
                 <a:solidFill>
                   <a:srgbClr val="A4B8C9"/>
@@ -9369,6 +9374,7 @@
               <a:spcAft>
                 <a:spcPts val="0"/>
               </a:spcAft>
+              <a:buNone/>
               <a:defRPr sz="1125" b="1">
                 <a:solidFill>
                   <a:srgbClr val="A4B8C9"/>
@@ -9433,6 +9439,7 @@
               <a:spcAft>
                 <a:spcPts val="0"/>
               </a:spcAft>
+              <a:buNone/>
               <a:defRPr sz="1275" b="0">
                 <a:solidFill>
                   <a:srgbClr val="A4B8C9"/>
@@ -9497,6 +9504,7 @@
               <a:spcAft>
                 <a:spcPts val="0"/>
               </a:spcAft>
+              <a:buNone/>
               <a:defRPr sz="1350" b="1">
                 <a:solidFill>
                   <a:srgbClr val="54D7FF"/>
@@ -9515,7 +9523,7 @@
                 <a:ea typeface="Arial"/>
                 <a:cs typeface="Arial"/>
               </a:rPr>
-              <a:t>АЛГОРИТМ ПЛАНИРОВАНИЯ ФИЧИ</a:t>
+              <a:t>ПРОЦЕСС ПЛАНИРОВАНИЯ</a:t>
             </a:r>
           </a:p>
         </p:txBody>
@@ -9579,7 +9587,7 @@
                 <a:ea typeface="Arial"/>
                 <a:cs typeface="Arial"/>
               </a:rPr>
-              <a:t>План не появляется из промпта.</a:t>
+              <a:t>Алгоритм планирования</a:t>
             </a:r>
           </a:p>
           <a:p xmlns:a="http://schemas.openxmlformats.org/drawingml/2006/main">
@@ -9602,24 +9610,13 @@
             <a:r>
               <a:rPr sz="4050" b="1">
                 <a:solidFill>
-                  <a:srgbClr val="F4F8FB"/>
-                </a:solidFill>
-                <a:latin typeface="Arial"/>
-                <a:ea typeface="Arial"/>
-                <a:cs typeface="Arial"/>
-              </a:rPr>
-              <a:t>Он собирается </a:t>
-            </a:r>
-            <a:r>
-              <a:rPr sz="4050" b="1">
-                <a:solidFill>
                   <a:srgbClr val="54D7FF"/>
                 </a:solidFill>
                 <a:latin typeface="Arial"/>
                 <a:ea typeface="Arial"/>
                 <a:cs typeface="Arial"/>
               </a:rPr>
-              <a:t>по шагам.</a:t>
+              <a:t>межсервисных изменений</a:t>
             </a:r>
           </a:p>
         </p:txBody>
@@ -9727,6 +9724,7 @@
               <a:spcAft>
                 <a:spcPts val="0"/>
               </a:spcAft>
+              <a:buNone/>
               <a:defRPr sz="1350" b="1">
                 <a:solidFill>
                   <a:srgbClr val="A4B8C9"/>
@@ -9791,6 +9789,7 @@
               <a:spcAft>
                 <a:spcPts val="0"/>
               </a:spcAft>
+              <a:buNone/>
               <a:defRPr sz="2025" b="1">
                 <a:solidFill>
                   <a:srgbClr val="F4F8FB"/>
@@ -9855,6 +9854,7 @@
               <a:spcAft>
                 <a:spcPts val="0"/>
               </a:spcAft>
+              <a:buNone/>
               <a:defRPr sz="1650" b="0">
                 <a:solidFill>
                   <a:srgbClr val="A4B8C9"/>
@@ -9981,6 +9981,7 @@
               <a:spcAft>
                 <a:spcPts val="0"/>
               </a:spcAft>
+              <a:buNone/>
               <a:defRPr sz="1350" b="1">
                 <a:solidFill>
                   <a:srgbClr val="A4B8C9"/>
@@ -10045,6 +10046,7 @@
               <a:spcAft>
                 <a:spcPts val="0"/>
               </a:spcAft>
+              <a:buNone/>
               <a:defRPr sz="2025" b="1">
                 <a:solidFill>
                   <a:srgbClr val="F4F8FB"/>
@@ -10109,6 +10111,7 @@
               <a:spcAft>
                 <a:spcPts val="0"/>
               </a:spcAft>
+              <a:buNone/>
               <a:defRPr sz="1650" b="0">
                 <a:solidFill>
                   <a:srgbClr val="A4B8C9"/>
@@ -10235,6 +10238,7 @@
               <a:spcAft>
                 <a:spcPts val="0"/>
               </a:spcAft>
+              <a:buNone/>
               <a:defRPr sz="1350" b="1">
                 <a:solidFill>
                   <a:srgbClr val="A4B8C9"/>
@@ -10299,6 +10303,7 @@
               <a:spcAft>
                 <a:spcPts val="0"/>
               </a:spcAft>
+              <a:buNone/>
               <a:defRPr sz="2025" b="1">
                 <a:solidFill>
                   <a:srgbClr val="F4F8FB"/>
@@ -10363,6 +10368,7 @@
               <a:spcAft>
                 <a:spcPts val="0"/>
               </a:spcAft>
+              <a:buNone/>
               <a:defRPr sz="1650" b="0">
                 <a:solidFill>
                   <a:srgbClr val="A4B8C9"/>
@@ -10489,6 +10495,7 @@
               <a:spcAft>
                 <a:spcPts val="0"/>
               </a:spcAft>
+              <a:buNone/>
               <a:defRPr sz="1350" b="1">
                 <a:solidFill>
                   <a:srgbClr val="A4B8C9"/>
@@ -10553,6 +10560,7 @@
               <a:spcAft>
                 <a:spcPts val="0"/>
               </a:spcAft>
+              <a:buNone/>
               <a:defRPr sz="2025" b="1">
                 <a:solidFill>
                   <a:srgbClr val="F4F8FB"/>
@@ -10617,6 +10625,7 @@
               <a:spcAft>
                 <a:spcPts val="0"/>
               </a:spcAft>
+              <a:buNone/>
               <a:defRPr sz="1650" b="0">
                 <a:solidFill>
                   <a:srgbClr val="A4B8C9"/>
@@ -10743,6 +10752,7 @@
               <a:spcAft>
                 <a:spcPts val="0"/>
               </a:spcAft>
+              <a:buNone/>
               <a:defRPr sz="1350" b="1">
                 <a:solidFill>
                   <a:srgbClr val="A4B8C9"/>
@@ -10807,6 +10817,7 @@
               <a:spcAft>
                 <a:spcPts val="0"/>
               </a:spcAft>
+              <a:buNone/>
               <a:defRPr sz="2025" b="1">
                 <a:solidFill>
                   <a:srgbClr val="F4F8FB"/>
@@ -10871,6 +10882,7 @@
               <a:spcAft>
                 <a:spcPts val="0"/>
               </a:spcAft>
+              <a:buNone/>
               <a:defRPr sz="1650" b="0">
                 <a:solidFill>
                   <a:srgbClr val="A4B8C9"/>
@@ -10997,6 +11009,7 @@
               <a:spcAft>
                 <a:spcPts val="0"/>
               </a:spcAft>
+              <a:buNone/>
               <a:defRPr sz="1350" b="1">
                 <a:solidFill>
                   <a:srgbClr val="A4B8C9"/>
@@ -11061,6 +11074,7 @@
               <a:spcAft>
                 <a:spcPts val="0"/>
               </a:spcAft>
+              <a:buNone/>
               <a:defRPr sz="2025" b="1">
                 <a:solidFill>
                   <a:srgbClr val="F4F8FB"/>
@@ -11125,6 +11139,7 @@
               <a:spcAft>
                 <a:spcPts val="0"/>
               </a:spcAft>
+              <a:buNone/>
               <a:defRPr sz="1650" b="0">
                 <a:solidFill>
                   <a:srgbClr val="A4B8C9"/>
@@ -11251,6 +11266,7 @@
               <a:spcAft>
                 <a:spcPts val="0"/>
               </a:spcAft>
+              <a:buNone/>
               <a:defRPr sz="1350" b="1">
                 <a:solidFill>
                   <a:srgbClr val="A4B8C9"/>
@@ -11315,6 +11331,7 @@
               <a:spcAft>
                 <a:spcPts val="0"/>
               </a:spcAft>
+              <a:buNone/>
               <a:defRPr sz="2025" b="1">
                 <a:solidFill>
                   <a:srgbClr val="F4F8FB"/>
@@ -11379,6 +11396,7 @@
               <a:spcAft>
                 <a:spcPts val="0"/>
               </a:spcAft>
+              <a:buNone/>
               <a:defRPr sz="1650" b="0">
                 <a:solidFill>
                   <a:srgbClr val="A4B8C9"/>
@@ -11505,6 +11523,7 @@
               <a:spcAft>
                 <a:spcPts val="0"/>
               </a:spcAft>
+              <a:buNone/>
               <a:defRPr sz="1350" b="1">
                 <a:solidFill>
                   <a:srgbClr val="A4B8C9"/>
@@ -11569,6 +11588,7 @@
               <a:spcAft>
                 <a:spcPts val="0"/>
               </a:spcAft>
+              <a:buNone/>
               <a:defRPr sz="2025" b="1">
                 <a:solidFill>
                   <a:srgbClr val="F4F8FB"/>
@@ -11633,6 +11653,7 @@
               <a:spcAft>
                 <a:spcPts val="0"/>
               </a:spcAft>
+              <a:buNone/>
               <a:defRPr sz="1650" b="0">
                 <a:solidFill>
                   <a:srgbClr val="A4B8C9"/>
@@ -11728,6 +11749,7 @@
               <a:spcAft>
                 <a:spcPts val="0"/>
               </a:spcAft>
+              <a:buNone/>
               <a:defRPr sz="1800" b="0">
                 <a:solidFill>
                   <a:srgbClr val="A4B8C9"/>
@@ -11904,6 +11926,7 @@
               <a:spcAft>
                 <a:spcPts val="0"/>
               </a:spcAft>
+              <a:buNone/>
               <a:defRPr sz="1125" b="1">
                 <a:solidFill>
                   <a:srgbClr val="A4B8C9"/>
@@ -11968,6 +11991,7 @@
               <a:spcAft>
                 <a:spcPts val="0"/>
               </a:spcAft>
+              <a:buNone/>
               <a:defRPr sz="1275" b="0">
                 <a:solidFill>
                   <a:srgbClr val="A4B8C9"/>
@@ -12032,6 +12056,7 @@
               <a:spcAft>
                 <a:spcPts val="0"/>
               </a:spcAft>
+              <a:buNone/>
               <a:defRPr sz="1350" b="1">
                 <a:solidFill>
                   <a:srgbClr val="54D7FF"/>
@@ -12050,7 +12075,7 @@
                 <a:ea typeface="Arial"/>
                 <a:cs typeface="Arial"/>
               </a:rPr>
-              <a:t>ПОВТОРЯЕМЫЙ ПРОЦЕСС В GIGACODE</a:t>
+              <a:t>СТРУКТУРА РЕЗУЛЬТАТА</a:t>
             </a:r>
           </a:p>
         </p:txBody>
@@ -12114,7 +12139,7 @@
                 <a:ea typeface="Arial"/>
                 <a:cs typeface="Arial"/>
               </a:rPr>
-              <a:t>Планировщик выдаёт не сочинение,</a:t>
+              <a:t>Формат PLAN_OUTPUT_V1</a:t>
             </a:r>
           </a:p>
           <a:p xmlns:a="http://schemas.openxmlformats.org/drawingml/2006/main">
@@ -12137,24 +12162,13 @@
             <a:r>
               <a:rPr sz="4050" b="1">
                 <a:solidFill>
-                  <a:srgbClr val="F4F8FB"/>
-                </a:solidFill>
-                <a:latin typeface="Arial"/>
-                <a:ea typeface="Arial"/>
-                <a:cs typeface="Arial"/>
-              </a:rPr>
-              <a:t>а </a:t>
-            </a:r>
-            <a:r>
-              <a:rPr sz="4050" b="1">
-                <a:solidFill>
                   <a:srgbClr val="54D7FF"/>
                 </a:solidFill>
                 <a:latin typeface="Arial"/>
                 <a:ea typeface="Arial"/>
                 <a:cs typeface="Arial"/>
               </a:rPr>
-              <a:t>строгий PLAN_OUTPUT_V1.</a:t>
+              <a:t>и проверка плана изменений</a:t>
             </a:r>
           </a:p>
         </p:txBody>
@@ -12359,6 +12373,7 @@
               <a:spcAft>
                 <a:spcPts val="0"/>
               </a:spcAft>
+              <a:buNone/>
               <a:defRPr sz="1425" b="0">
                 <a:solidFill>
                   <a:srgbClr val="A4B8C9"/>
@@ -12423,6 +12438,7 @@
               <a:spcAft>
                 <a:spcPts val="0"/>
               </a:spcAft>
+              <a:buNone/>
               <a:defRPr sz="2250" b="1">
                 <a:solidFill>
                   <a:srgbClr val="F4F8FB"/>
@@ -12487,6 +12503,7 @@
               <a:spcAft>
                 <a:spcPts val="0"/>
               </a:spcAft>
+              <a:buNone/>
               <a:defRPr sz="1725" b="0">
                 <a:solidFill>
                   <a:srgbClr val="A4B8C9"/>
@@ -12617,6 +12634,7 @@
               <a:spcAft>
                 <a:spcPts val="0"/>
               </a:spcAft>
+              <a:buNone/>
               <a:defRPr sz="1425" b="0">
                 <a:solidFill>
                   <a:srgbClr val="A4B8C9"/>
@@ -12681,6 +12699,7 @@
               <a:spcAft>
                 <a:spcPts val="0"/>
               </a:spcAft>
+              <a:buNone/>
               <a:defRPr sz="2250" b="1">
                 <a:solidFill>
                   <a:srgbClr val="F4F8FB"/>
@@ -12745,6 +12764,7 @@
               <a:spcAft>
                 <a:spcPts val="0"/>
               </a:spcAft>
+              <a:buNone/>
               <a:defRPr sz="1725" b="0">
                 <a:solidFill>
                   <a:srgbClr val="A4B8C9"/>
@@ -12875,6 +12895,7 @@
               <a:spcAft>
                 <a:spcPts val="0"/>
               </a:spcAft>
+              <a:buNone/>
               <a:defRPr sz="1425" b="0">
                 <a:solidFill>
                   <a:srgbClr val="A4B8C9"/>
@@ -12939,6 +12960,7 @@
               <a:spcAft>
                 <a:spcPts val="0"/>
               </a:spcAft>
+              <a:buNone/>
               <a:defRPr sz="2250" b="1">
                 <a:solidFill>
                   <a:srgbClr val="F4F8FB"/>
@@ -13003,6 +13025,7 @@
               <a:spcAft>
                 <a:spcPts val="0"/>
               </a:spcAft>
+              <a:buNone/>
               <a:defRPr sz="1725" b="0">
                 <a:solidFill>
                   <a:srgbClr val="A4B8C9"/>
@@ -13133,6 +13156,7 @@
               <a:spcAft>
                 <a:spcPts val="0"/>
               </a:spcAft>
+              <a:buNone/>
               <a:defRPr sz="1425" b="0">
                 <a:solidFill>
                   <a:srgbClr val="A4B8C9"/>
@@ -13197,6 +13221,7 @@
               <a:spcAft>
                 <a:spcPts val="0"/>
               </a:spcAft>
+              <a:buNone/>
               <a:defRPr sz="2250" b="1">
                 <a:solidFill>
                   <a:srgbClr val="F4F8FB"/>
@@ -13261,6 +13286,7 @@
               <a:spcAft>
                 <a:spcPts val="0"/>
               </a:spcAft>
+              <a:buNone/>
               <a:defRPr sz="1725" b="0">
                 <a:solidFill>
                   <a:srgbClr val="A4B8C9"/>
@@ -13356,6 +13382,7 @@
               <a:spcAft>
                 <a:spcPts val="0"/>
               </a:spcAft>
+              <a:buNone/>
               <a:defRPr sz="1800" b="0">
                 <a:solidFill>
                   <a:srgbClr val="A4B8C9"/>
@@ -13521,6 +13548,7 @@
               <a:spcAft>
                 <a:spcPts val="0"/>
               </a:spcAft>
+              <a:buNone/>
               <a:defRPr sz="1125" b="1">
                 <a:solidFill>
                   <a:srgbClr val="A4B8C9"/>
@@ -13585,6 +13613,7 @@
               <a:spcAft>
                 <a:spcPts val="0"/>
               </a:spcAft>
+              <a:buNone/>
               <a:defRPr sz="1275" b="0">
                 <a:solidFill>
                   <a:srgbClr val="A4B8C9"/>
@@ -13649,6 +13678,7 @@
               <a:spcAft>
                 <a:spcPts val="0"/>
               </a:spcAft>
+              <a:buNone/>
               <a:defRPr sz="1350" b="1">
                 <a:solidFill>
                   <a:srgbClr val="54D7FF"/>
@@ -13667,7 +13697,7 @@
                 <a:ea typeface="Arial"/>
                 <a:cs typeface="Arial"/>
               </a:rPr>
-              <a:t>СКРИНШОТ · GIGACODE</a:t>
+              <a:t>ПЛАН ИЗМЕНЕНИЙ В GIGACODE</a:t>
             </a:r>
           </a:p>
         </p:txBody>
@@ -13731,7 +13761,7 @@
                 <a:ea typeface="Arial"/>
                 <a:cs typeface="Arial"/>
               </a:rPr>
-              <a:t>На экране — план, который можно</a:t>
+              <a:t>Планирование межсервисных изменений</a:t>
             </a:r>
           </a:p>
           <a:p xmlns:a="http://schemas.openxmlformats.org/drawingml/2006/main">
@@ -13760,7 +13790,7 @@
                 <a:ea typeface="Arial"/>
                 <a:cs typeface="Arial"/>
               </a:rPr>
-              <a:t>обсуждать и проверять.</a:t>
+              <a:t>в GigaCode</a:t>
             </a:r>
           </a:p>
         </p:txBody>
@@ -13965,6 +13995,7 @@
               <a:spcAft>
                 <a:spcPts val="0"/>
               </a:spcAft>
+              <a:buNone/>
               <a:defRPr sz="1575" b="0">
                 <a:solidFill>
                   <a:srgbClr val="A4B8C9"/>
@@ -14029,6 +14060,7 @@
               <a:spcAft>
                 <a:spcPts val="0"/>
               </a:spcAft>
+              <a:buNone/>
               <a:defRPr sz="3300" b="1">
                 <a:solidFill>
                   <a:srgbClr val="54D7FF"/>
@@ -14093,6 +14125,7 @@
               <a:spcAft>
                 <a:spcPts val="0"/>
               </a:spcAft>
+              <a:buNone/>
               <a:defRPr sz="1875" b="0">
                 <a:solidFill>
                   <a:srgbClr val="A4B8C9"/>
@@ -14188,6 +14221,7 @@
               <a:spcAft>
                 <a:spcPts val="0"/>
               </a:spcAft>
+              <a:buNone/>
               <a:defRPr sz="2025" b="1">
                 <a:solidFill>
                   <a:srgbClr val="F4F8FB"/>
@@ -14252,6 +14286,7 @@
               <a:spcAft>
                 <a:spcPts val="0"/>
               </a:spcAft>
+              <a:buNone/>
               <a:defRPr sz="1650" b="0">
                 <a:solidFill>
                   <a:srgbClr val="A4B8C9"/>
@@ -14347,6 +14382,7 @@
               <a:spcAft>
                 <a:spcPts val="0"/>
               </a:spcAft>
+              <a:buNone/>
               <a:defRPr sz="2025" b="1">
                 <a:solidFill>
                   <a:srgbClr val="F4F8FB"/>
@@ -14411,6 +14447,7 @@
               <a:spcAft>
                 <a:spcPts val="0"/>
               </a:spcAft>
+              <a:buNone/>
               <a:defRPr sz="1650" b="0">
                 <a:solidFill>
                   <a:srgbClr val="A4B8C9"/>
@@ -14506,6 +14543,7 @@
               <a:spcAft>
                 <a:spcPts val="0"/>
               </a:spcAft>
+              <a:buNone/>
               <a:defRPr sz="2025" b="1">
                 <a:solidFill>
                   <a:srgbClr val="F4F8FB"/>
@@ -14570,6 +14608,7 @@
               <a:spcAft>
                 <a:spcPts val="0"/>
               </a:spcAft>
+              <a:buNone/>
               <a:defRPr sz="1650" b="0">
                 <a:solidFill>
                   <a:srgbClr val="A4B8C9"/>
@@ -14665,6 +14704,7 @@
               <a:spcAft>
                 <a:spcPts val="0"/>
               </a:spcAft>
+              <a:buNone/>
               <a:defRPr sz="2025" b="1">
                 <a:solidFill>
                   <a:srgbClr val="F4F8FB"/>
@@ -14729,6 +14769,7 @@
               <a:spcAft>
                 <a:spcPts val="0"/>
               </a:spcAft>
+              <a:buNone/>
               <a:defRPr sz="1650" b="0">
                 <a:solidFill>
                   <a:srgbClr val="A4B8C9"/>
@@ -14894,6 +14935,7 @@
               <a:spcAft>
                 <a:spcPts val="0"/>
               </a:spcAft>
+              <a:buNone/>
               <a:defRPr sz="1125" b="1">
                 <a:solidFill>
                   <a:srgbClr val="A4B8C9"/>
@@ -14958,6 +15000,7 @@
               <a:spcAft>
                 <a:spcPts val="0"/>
               </a:spcAft>
+              <a:buNone/>
               <a:defRPr sz="1275" b="0">
                 <a:solidFill>
                   <a:srgbClr val="A4B8C9"/>
@@ -15022,6 +15065,7 @@
               <a:spcAft>
                 <a:spcPts val="0"/>
               </a:spcAft>
+              <a:buNone/>
               <a:defRPr sz="1350" b="1">
                 <a:solidFill>
                   <a:srgbClr val="54D7FF"/>
@@ -15040,7 +15084,7 @@
                 <a:ea typeface="Arial"/>
                 <a:cs typeface="Arial"/>
               </a:rPr>
-              <a:t>СКРИНШОТ · GIGACODE + JIRA</a:t>
+              <a:t>ПУБЛИКАЦИЯ ЗАДАЧ В JIRA</a:t>
             </a:r>
           </a:p>
         </p:txBody>
@@ -15104,7 +15148,7 @@
                 <a:ea typeface="Arial"/>
                 <a:cs typeface="Arial"/>
               </a:rPr>
-              <a:t>После подтверждения план превращается</a:t>
+              <a:t>Создание задач Jira</a:t>
             </a:r>
           </a:p>
           <a:p xmlns:a="http://schemas.openxmlformats.org/drawingml/2006/main">
@@ -15127,24 +15171,13 @@
             <a:r>
               <a:rPr sz="4050" b="1">
                 <a:solidFill>
-                  <a:srgbClr val="F4F8FB"/>
-                </a:solidFill>
-                <a:latin typeface="Arial"/>
-                <a:ea typeface="Arial"/>
-                <a:cs typeface="Arial"/>
-              </a:rPr>
-              <a:t>в </a:t>
-            </a:r>
-            <a:r>
-              <a:rPr sz="4050" b="1">
-                <a:solidFill>
                   <a:srgbClr val="FFBD73"/>
                 </a:solidFill>
                 <a:latin typeface="Arial"/>
                 <a:ea typeface="Arial"/>
                 <a:cs typeface="Arial"/>
               </a:rPr>
-              <a:t>Jira-задачи по сервисам</a:t>
+              <a:t>на основе согласованного плана</a:t>
             </a:r>
           </a:p>
         </p:txBody>
@@ -15349,6 +15382,7 @@
               <a:spcAft>
                 <a:spcPts val="0"/>
               </a:spcAft>
+              <a:buNone/>
               <a:defRPr sz="1575" b="0">
                 <a:solidFill>
                   <a:srgbClr val="A4B8C9"/>
@@ -15413,6 +15447,7 @@
               <a:spcAft>
                 <a:spcPts val="0"/>
               </a:spcAft>
+              <a:buNone/>
               <a:defRPr sz="2700" b="1">
                 <a:solidFill>
                   <a:srgbClr val="FFBD73"/>
@@ -15477,6 +15512,7 @@
               <a:spcAft>
                 <a:spcPts val="0"/>
               </a:spcAft>
+              <a:buNone/>
               <a:defRPr sz="1875" b="0">
                 <a:solidFill>
                   <a:srgbClr val="A4B8C9"/>
@@ -15572,6 +15608,7 @@
               <a:spcAft>
                 <a:spcPts val="0"/>
               </a:spcAft>
+              <a:buNone/>
               <a:defRPr sz="2025" b="1">
                 <a:solidFill>
                   <a:srgbClr val="F4F8FB"/>
@@ -15636,6 +15673,7 @@
               <a:spcAft>
                 <a:spcPts val="0"/>
               </a:spcAft>
+              <a:buNone/>
               <a:defRPr sz="1650" b="0">
                 <a:solidFill>
                   <a:srgbClr val="A4B8C9"/>
@@ -15731,6 +15769,7 @@
               <a:spcAft>
                 <a:spcPts val="0"/>
               </a:spcAft>
+              <a:buNone/>
               <a:defRPr sz="2025" b="1">
                 <a:solidFill>
                   <a:srgbClr val="F4F8FB"/>
@@ -15795,6 +15834,7 @@
               <a:spcAft>
                 <a:spcPts val="0"/>
               </a:spcAft>
+              <a:buNone/>
               <a:defRPr sz="1650" b="0">
                 <a:solidFill>
                   <a:srgbClr val="A4B8C9"/>
@@ -15890,6 +15930,7 @@
               <a:spcAft>
                 <a:spcPts val="0"/>
               </a:spcAft>
+              <a:buNone/>
               <a:defRPr sz="2025" b="1">
                 <a:solidFill>
                   <a:srgbClr val="F4F8FB"/>
@@ -15954,6 +15995,7 @@
               <a:spcAft>
                 <a:spcPts val="0"/>
               </a:spcAft>
+              <a:buNone/>
               <a:defRPr sz="1650" b="0">
                 <a:solidFill>
                   <a:srgbClr val="A4B8C9"/>
@@ -16049,6 +16091,7 @@
               <a:spcAft>
                 <a:spcPts val="0"/>
               </a:spcAft>
+              <a:buNone/>
               <a:defRPr sz="2325" b="1">
                 <a:solidFill>
                   <a:srgbClr val="FFBD73"/>
@@ -16113,6 +16156,7 @@
               <a:spcAft>
                 <a:spcPts val="0"/>
               </a:spcAft>
+              <a:buNone/>
               <a:defRPr sz="1725" b="0">
                 <a:solidFill>
                   <a:srgbClr val="A4B8C9"/>
@@ -16208,6 +16252,7 @@
               <a:spcAft>
                 <a:spcPts val="0"/>
               </a:spcAft>
+              <a:buNone/>
               <a:defRPr sz="2325" b="1">
                 <a:solidFill>
                   <a:srgbClr val="FFBD73"/>
@@ -16272,6 +16317,7 @@
               <a:spcAft>
                 <a:spcPts val="0"/>
               </a:spcAft>
+              <a:buNone/>
               <a:defRPr sz="1725" b="0">
                 <a:solidFill>
                   <a:srgbClr val="A4B8C9"/>
@@ -16367,6 +16413,7 @@
               <a:spcAft>
                 <a:spcPts val="0"/>
               </a:spcAft>
+              <a:buNone/>
               <a:defRPr sz="2325" b="1">
                 <a:solidFill>
                   <a:srgbClr val="FFBD73"/>
@@ -16431,6 +16478,7 @@
               <a:spcAft>
                 <a:spcPts val="0"/>
               </a:spcAft>
+              <a:buNone/>
               <a:defRPr sz="1725" b="0">
                 <a:solidFill>
                   <a:srgbClr val="A4B8C9"/>
@@ -16596,6 +16644,7 @@
               <a:spcAft>
                 <a:spcPts val="0"/>
               </a:spcAft>
+              <a:buNone/>
               <a:defRPr sz="1125" b="1">
                 <a:solidFill>
                   <a:srgbClr val="A4B8C9"/>
@@ -16660,6 +16709,7 @@
               <a:spcAft>
                 <a:spcPts val="0"/>
               </a:spcAft>
+              <a:buNone/>
               <a:defRPr sz="1275" b="0">
                 <a:solidFill>
                   <a:srgbClr val="A4B8C9"/>
@@ -16724,6 +16774,7 @@
               <a:spcAft>
                 <a:spcPts val="0"/>
               </a:spcAft>
+              <a:buNone/>
               <a:defRPr sz="1350" b="1">
                 <a:solidFill>
                   <a:srgbClr val="54D7FF"/>
@@ -16742,7 +16793,7 @@
                 <a:ea typeface="Arial"/>
                 <a:cs typeface="Arial"/>
               </a:rPr>
-              <a:t>КАК НЕ ВЫДАТЬ ДОГАДКУ ЗА ФАКТ</a:t>
+              <a:t>КОНТРОЛЬ КАЧЕСТВА</a:t>
             </a:r>
           </a:p>
         </p:txBody>
@@ -16806,7 +16857,7 @@
                 <a:ea typeface="Arial"/>
                 <a:cs typeface="Arial"/>
               </a:rPr>
-              <a:t>У важного вывода есть источник.</a:t>
+              <a:t>Проверяемость результатов</a:t>
             </a:r>
           </a:p>
           <a:p xmlns:a="http://schemas.openxmlformats.org/drawingml/2006/main">
@@ -16829,24 +16880,13 @@
             <a:r>
               <a:rPr sz="4050" b="1">
                 <a:solidFill>
-                  <a:srgbClr val="F4F8FB"/>
-                </a:solidFill>
-                <a:latin typeface="Arial"/>
-                <a:ea typeface="Arial"/>
-                <a:cs typeface="Arial"/>
-              </a:rPr>
-              <a:t>Или честная пометка: </a:t>
-            </a:r>
-            <a:r>
-              <a:rPr sz="4050" b="1">
-                <a:solidFill>
                   <a:srgbClr val="FFBD73"/>
                 </a:solidFill>
                 <a:latin typeface="Arial"/>
                 <a:ea typeface="Arial"/>
                 <a:cs typeface="Arial"/>
               </a:rPr>
-              <a:t>«не знаем».</a:t>
+              <a:t>и ограничения подхода</a:t>
             </a:r>
           </a:p>
         </p:txBody>
@@ -16923,6 +16963,7 @@
               <a:spcAft>
                 <a:spcPts val="0"/>
               </a:spcAft>
+              <a:buNone/>
               <a:defRPr sz="2475" b="1">
                 <a:solidFill>
                   <a:srgbClr val="F4F8FB"/>
@@ -16987,6 +17028,7 @@
               <a:spcAft>
                 <a:spcPts val="0"/>
               </a:spcAft>
+              <a:buNone/>
               <a:defRPr sz="1950" b="0">
                 <a:solidFill>
                   <a:srgbClr val="A4B8C9"/>
@@ -17082,6 +17124,7 @@
               <a:spcAft>
                 <a:spcPts val="0"/>
               </a:spcAft>
+              <a:buNone/>
               <a:defRPr sz="2475" b="1">
                 <a:solidFill>
                   <a:srgbClr val="F4F8FB"/>
@@ -17146,6 +17189,7 @@
               <a:spcAft>
                 <a:spcPts val="0"/>
               </a:spcAft>
+              <a:buNone/>
               <a:defRPr sz="1950" b="0">
                 <a:solidFill>
                   <a:srgbClr val="A4B8C9"/>
@@ -17241,6 +17285,7 @@
               <a:spcAft>
                 <a:spcPts val="0"/>
               </a:spcAft>
+              <a:buNone/>
               <a:defRPr sz="2475" b="1">
                 <a:solidFill>
                   <a:srgbClr val="F4F8FB"/>
@@ -17305,6 +17350,7 @@
               <a:spcAft>
                 <a:spcPts val="0"/>
               </a:spcAft>
+              <a:buNone/>
               <a:defRPr sz="1950" b="0">
                 <a:solidFill>
                   <a:srgbClr val="A4B8C9"/>
@@ -17369,6 +17415,7 @@
               <a:spcAft>
                 <a:spcPts val="0"/>
               </a:spcAft>
+              <a:buNone/>
               <a:defRPr sz="2550" b="0">
                 <a:solidFill>
                   <a:srgbClr val="F4F8FB"/>
@@ -17556,6 +17603,7 @@
               <a:spcAft>
                 <a:spcPts val="0"/>
               </a:spcAft>
+              <a:buNone/>
               <a:defRPr sz="1125" b="1">
                 <a:solidFill>
                   <a:srgbClr val="A4B8C9"/>
@@ -17620,6 +17668,7 @@
               <a:spcAft>
                 <a:spcPts val="0"/>
               </a:spcAft>
+              <a:buNone/>
               <a:defRPr sz="1275" b="0">
                 <a:solidFill>
                   <a:srgbClr val="A4B8C9"/>
@@ -17684,6 +17733,7 @@
               <a:spcAft>
                 <a:spcPts val="0"/>
               </a:spcAft>
+              <a:buNone/>
               <a:defRPr sz="1350" b="1">
                 <a:solidFill>
                   <a:srgbClr val="54D7FF"/>
@@ -17702,7 +17752,7 @@
                 <a:ea typeface="Arial"/>
                 <a:cs typeface="Arial"/>
               </a:rPr>
-              <a:t>ТИПОВАЯ ЗАДАЧА ИЗ БЭКЛОГА</a:t>
+              <a:t>ИСХОДНЫЕ ДАННЫЕ ДЛЯ ПЛАНИРОВАНИЯ</a:t>
             </a:r>
           </a:p>
         </p:txBody>
@@ -17766,7 +17816,7 @@
                 <a:ea typeface="Arial"/>
                 <a:cs typeface="Arial"/>
               </a:rPr>
-              <a:t>«Перенести дату платежа по кредиту физлица».</a:t>
+              <a:t>Анализ требований и текущего состояния</a:t>
             </a:r>
           </a:p>
           <a:p xmlns:a="http://schemas.openxmlformats.org/drawingml/2006/main">
@@ -17789,24 +17839,13 @@
             <a:r>
               <a:rPr sz="4050" b="1">
                 <a:solidFill>
-                  <a:srgbClr val="F4F8FB"/>
-                </a:solidFill>
-                <a:latin typeface="Arial"/>
-                <a:ea typeface="Arial"/>
-                <a:cs typeface="Arial"/>
-              </a:rPr>
-              <a:t>Сначала надо понять, </a:t>
-            </a:r>
-            <a:r>
-              <a:rPr sz="4050" b="1">
-                <a:solidFill>
                   <a:srgbClr val="FFBD73"/>
                 </a:solidFill>
                 <a:latin typeface="Arial"/>
                 <a:ea typeface="Arial"/>
                 <a:cs typeface="Arial"/>
               </a:rPr>
-              <a:t>что уже есть.</a:t>
+              <a:t>перед планированием изменений</a:t>
             </a:r>
           </a:p>
         </p:txBody>
@@ -18042,6 +18081,7 @@
               <a:spcAft>
                 <a:spcPts val="0"/>
               </a:spcAft>
+              <a:buNone/>
               <a:defRPr sz="2175" b="1">
                 <a:solidFill>
                   <a:srgbClr val="F4F8FB"/>
@@ -18106,6 +18146,7 @@
               <a:spcAft>
                 <a:spcPts val="0"/>
               </a:spcAft>
+              <a:buNone/>
               <a:defRPr sz="1650" b="0">
                 <a:solidFill>
                   <a:srgbClr val="A4B8C9"/>
@@ -18236,6 +18277,7 @@
               <a:spcAft>
                 <a:spcPts val="0"/>
               </a:spcAft>
+              <a:buNone/>
               <a:defRPr sz="2175" b="1">
                 <a:solidFill>
                   <a:srgbClr val="F4F8FB"/>
@@ -18265,6 +18307,7 @@
               <a:spcAft>
                 <a:spcPts val="0"/>
               </a:spcAft>
+              <a:buNone/>
               <a:defRPr sz="2175" b="1">
                 <a:solidFill>
                   <a:srgbClr val="F4F8FB"/>
@@ -18329,6 +18372,7 @@
               <a:spcAft>
                 <a:spcPts val="0"/>
               </a:spcAft>
+              <a:buNone/>
               <a:defRPr sz="1650" b="0">
                 <a:solidFill>
                   <a:srgbClr val="A4B8C9"/>
@@ -18459,6 +18503,7 @@
               <a:spcAft>
                 <a:spcPts val="0"/>
               </a:spcAft>
+              <a:buNone/>
               <a:defRPr sz="2175" b="1">
                 <a:solidFill>
                   <a:srgbClr val="F4F8FB"/>
@@ -18488,6 +18533,7 @@
               <a:spcAft>
                 <a:spcPts val="0"/>
               </a:spcAft>
+              <a:buNone/>
               <a:defRPr sz="2175" b="1">
                 <a:solidFill>
                   <a:srgbClr val="F4F8FB"/>
@@ -18552,6 +18598,7 @@
               <a:spcAft>
                 <a:spcPts val="0"/>
               </a:spcAft>
+              <a:buNone/>
               <a:defRPr sz="1650" b="0">
                 <a:solidFill>
                   <a:srgbClr val="A4B8C9"/>
@@ -18682,6 +18729,7 @@
               <a:spcAft>
                 <a:spcPts val="0"/>
               </a:spcAft>
+              <a:buNone/>
               <a:defRPr sz="2175" b="1">
                 <a:solidFill>
                   <a:srgbClr val="F4F8FB"/>
@@ -18711,6 +18759,7 @@
               <a:spcAft>
                 <a:spcPts val="0"/>
               </a:spcAft>
+              <a:buNone/>
               <a:defRPr sz="2175" b="1">
                 <a:solidFill>
                   <a:srgbClr val="F4F8FB"/>
@@ -18775,6 +18824,7 @@
               <a:spcAft>
                 <a:spcPts val="0"/>
               </a:spcAft>
+              <a:buNone/>
               <a:defRPr sz="1650" b="0">
                 <a:solidFill>
                   <a:srgbClr val="A4B8C9"/>
@@ -18905,6 +18955,7 @@
               <a:spcAft>
                 <a:spcPts val="0"/>
               </a:spcAft>
+              <a:buNone/>
               <a:defRPr sz="2175" b="1">
                 <a:solidFill>
                   <a:srgbClr val="F4F8FB"/>
@@ -18969,6 +19020,7 @@
               <a:spcAft>
                 <a:spcPts val="0"/>
               </a:spcAft>
+              <a:buNone/>
               <a:defRPr sz="1650" b="0">
                 <a:solidFill>
                   <a:srgbClr val="A4B8C9"/>
@@ -19064,6 +19116,7 @@
               <a:spcAft>
                 <a:spcPts val="0"/>
               </a:spcAft>
+              <a:buNone/>
               <a:defRPr sz="1800" b="0">
                 <a:solidFill>
                   <a:srgbClr val="A4B8C9"/>
@@ -19240,6 +19293,7 @@
               <a:spcAft>
                 <a:spcPts val="0"/>
               </a:spcAft>
+              <a:buNone/>
               <a:defRPr sz="1125" b="1">
                 <a:solidFill>
                   <a:srgbClr val="A4B8C9"/>
@@ -19304,6 +19358,7 @@
               <a:spcAft>
                 <a:spcPts val="0"/>
               </a:spcAft>
+              <a:buNone/>
               <a:defRPr sz="1275" b="0">
                 <a:solidFill>
                   <a:srgbClr val="A4B8C9"/>
@@ -19368,6 +19423,7 @@
               <a:spcAft>
                 <a:spcPts val="0"/>
               </a:spcAft>
+              <a:buNone/>
               <a:defRPr sz="1350" b="1">
                 <a:solidFill>
                   <a:srgbClr val="54D7FF"/>
@@ -19386,7 +19442,7 @@
                 <a:ea typeface="Arial"/>
                 <a:cs typeface="Arial"/>
               </a:rPr>
-              <a:t>ВЫВОДЫ</a:t>
+              <a:t>РЕЗУЛЬТАТЫ</a:t>
             </a:r>
           </a:p>
         </p:txBody>
@@ -19450,7 +19506,7 @@
                 <a:ea typeface="Arial"/>
                 <a:cs typeface="Arial"/>
               </a:rPr>
-              <a:t>Общий контекст делает SDD</a:t>
+              <a:t>Результаты применения общего контекста</a:t>
             </a:r>
           </a:p>
           <a:p xmlns:a="http://schemas.openxmlformats.org/drawingml/2006/main">
@@ -19479,7 +19535,7 @@
                 <a:ea typeface="Arial"/>
                 <a:cs typeface="Arial"/>
               </a:rPr>
-              <a:t>рабочим на масштабе</a:t>
+              <a:t>в SDD-разработке</a:t>
             </a:r>
           </a:p>
         </p:txBody>
@@ -19556,6 +19612,7 @@
               <a:spcAft>
                 <a:spcPts val="0"/>
               </a:spcAft>
+              <a:buNone/>
               <a:defRPr sz="2850" b="1">
                 <a:solidFill>
                   <a:srgbClr val="5CE3A0"/>
@@ -19620,6 +19677,7 @@
               <a:spcAft>
                 <a:spcPts val="0"/>
               </a:spcAft>
+              <a:buNone/>
               <a:defRPr sz="1950" b="0">
                 <a:solidFill>
                   <a:srgbClr val="5CE3A0"/>
@@ -19684,6 +19742,7 @@
               <a:spcAft>
                 <a:spcPts val="0"/>
               </a:spcAft>
+              <a:buNone/>
               <a:defRPr sz="1950" b="0">
                 <a:solidFill>
                   <a:srgbClr val="A4B8C9"/>
@@ -19748,6 +19807,7 @@
               <a:spcAft>
                 <a:spcPts val="0"/>
               </a:spcAft>
+              <a:buNone/>
               <a:defRPr sz="1950" b="0">
                 <a:solidFill>
                   <a:srgbClr val="5CE3A0"/>
@@ -19812,6 +19872,7 @@
               <a:spcAft>
                 <a:spcPts val="0"/>
               </a:spcAft>
+              <a:buNone/>
               <a:defRPr sz="1950" b="0">
                 <a:solidFill>
                   <a:srgbClr val="A4B8C9"/>
@@ -19876,6 +19937,7 @@
               <a:spcAft>
                 <a:spcPts val="0"/>
               </a:spcAft>
+              <a:buNone/>
               <a:defRPr sz="1950" b="0">
                 <a:solidFill>
                   <a:srgbClr val="5CE3A0"/>
@@ -19940,6 +20002,7 @@
               <a:spcAft>
                 <a:spcPts val="0"/>
               </a:spcAft>
+              <a:buNone/>
               <a:defRPr sz="1950" b="0">
                 <a:solidFill>
                   <a:srgbClr val="A4B8C9"/>
@@ -20035,6 +20098,7 @@
               <a:spcAft>
                 <a:spcPts val="0"/>
               </a:spcAft>
+              <a:buNone/>
               <a:defRPr sz="2850" b="1">
                 <a:solidFill>
                   <a:srgbClr val="54D7FF"/>
@@ -20099,6 +20163,7 @@
               <a:spcAft>
                 <a:spcPts val="0"/>
               </a:spcAft>
+              <a:buNone/>
               <a:defRPr sz="1950" b="0">
                 <a:solidFill>
                   <a:srgbClr val="54D7FF"/>
@@ -20163,6 +20228,7 @@
               <a:spcAft>
                 <a:spcPts val="0"/>
               </a:spcAft>
+              <a:buNone/>
               <a:defRPr sz="1950" b="0">
                 <a:solidFill>
                   <a:srgbClr val="A4B8C9"/>
@@ -20227,6 +20293,7 @@
               <a:spcAft>
                 <a:spcPts val="0"/>
               </a:spcAft>
+              <a:buNone/>
               <a:defRPr sz="1950" b="0">
                 <a:solidFill>
                   <a:srgbClr val="54D7FF"/>
@@ -20291,6 +20358,7 @@
               <a:spcAft>
                 <a:spcPts val="0"/>
               </a:spcAft>
+              <a:buNone/>
               <a:defRPr sz="1950" b="0">
                 <a:solidFill>
                   <a:srgbClr val="A4B8C9"/>
@@ -20355,6 +20423,7 @@
               <a:spcAft>
                 <a:spcPts val="0"/>
               </a:spcAft>
+              <a:buNone/>
               <a:defRPr sz="1950" b="0">
                 <a:solidFill>
                   <a:srgbClr val="54D7FF"/>
@@ -20419,6 +20488,7 @@
               <a:spcAft>
                 <a:spcPts val="0"/>
               </a:spcAft>
+              <a:buNone/>
               <a:defRPr sz="1950" b="0">
                 <a:solidFill>
                   <a:srgbClr val="A4B8C9"/>
@@ -20514,6 +20584,7 @@
               <a:spcAft>
                 <a:spcPts val="0"/>
               </a:spcAft>
+              <a:buNone/>
               <a:defRPr sz="1800" b="0">
                 <a:solidFill>
                   <a:srgbClr val="A4B8C9"/>
@@ -20690,6 +20761,7 @@
               <a:spcAft>
                 <a:spcPts val="0"/>
               </a:spcAft>
+              <a:buNone/>
               <a:defRPr sz="1125" b="1">
                 <a:solidFill>
                   <a:srgbClr val="A4B8C9"/>
@@ -20754,6 +20826,7 @@
               <a:spcAft>
                 <a:spcPts val="0"/>
               </a:spcAft>
+              <a:buNone/>
               <a:defRPr sz="1275" b="0">
                 <a:solidFill>
                   <a:srgbClr val="A4B8C9"/>
@@ -20818,6 +20891,7 @@
               <a:spcAft>
                 <a:spcPts val="0"/>
               </a:spcAft>
+              <a:buNone/>
               <a:defRPr sz="1350" b="1">
                 <a:solidFill>
                   <a:srgbClr val="54D7FF"/>
@@ -20836,7 +20910,7 @@
                 <a:ea typeface="Arial"/>
                 <a:cs typeface="Arial"/>
               </a:rPr>
-              <a:t>ПОЧЕМУ ЭТО БОЛЬШАЯ СИСТЕМА</a:t>
+              <a:t>МАСШТАБ И ЗАВИСИМОСТИ СИСТЕМЫ</a:t>
             </a:r>
           </a:p>
         </p:txBody>
@@ -20900,7 +20974,7 @@
                 <a:ea typeface="Arial"/>
                 <a:cs typeface="Arial"/>
               </a:rPr>
-              <a:t>300+ сервисов — это не 300 папок.</a:t>
+              <a:t>Планирование изменений</a:t>
             </a:r>
           </a:p>
           <a:p xmlns:a="http://schemas.openxmlformats.org/drawingml/2006/main">
@@ -20923,24 +20997,13 @@
             <a:r>
               <a:rPr sz="4050" b="1">
                 <a:solidFill>
-                  <a:srgbClr val="F4F8FB"/>
-                </a:solidFill>
-                <a:latin typeface="Arial"/>
-                <a:ea typeface="Arial"/>
-                <a:cs typeface="Arial"/>
-              </a:rPr>
-              <a:t>Это </a:t>
-            </a:r>
-            <a:r>
-              <a:rPr sz="4050" b="1">
-                <a:solidFill>
                   <a:srgbClr val="FF7C8B"/>
                 </a:solidFill>
                 <a:latin typeface="Arial"/>
                 <a:ea typeface="Arial"/>
                 <a:cs typeface="Arial"/>
               </a:rPr>
-              <a:t>сотни границ.</a:t>
+              <a:t>в системе из 300+ микросервисов</a:t>
             </a:r>
           </a:p>
         </p:txBody>
@@ -20986,6 +21049,7 @@
               <a:spcAft>
                 <a:spcPts val="0"/>
               </a:spcAft>
+              <a:buNone/>
               <a:defRPr sz="12450" b="1">
                 <a:solidFill>
                   <a:srgbClr val="54D7FF"/>
@@ -21050,6 +21114,7 @@
               <a:spcAft>
                 <a:spcPts val="0"/>
               </a:spcAft>
+              <a:buNone/>
               <a:defRPr sz="2250" b="0">
                 <a:solidFill>
                   <a:srgbClr val="A4B8C9"/>
@@ -21079,6 +21144,7 @@
               <a:spcAft>
                 <a:spcPts val="0"/>
               </a:spcAft>
+              <a:buNone/>
               <a:defRPr sz="2250" b="0">
                 <a:solidFill>
                   <a:srgbClr val="A4B8C9"/>
@@ -21174,6 +21240,7 @@
               <a:spcAft>
                 <a:spcPts val="0"/>
               </a:spcAft>
+              <a:buNone/>
               <a:defRPr sz="2250" b="1">
                 <a:solidFill>
                   <a:srgbClr val="F4F8FB"/>
@@ -21238,6 +21305,7 @@
               <a:spcAft>
                 <a:spcPts val="0"/>
               </a:spcAft>
+              <a:buNone/>
               <a:defRPr sz="1875" b="0">
                 <a:solidFill>
                   <a:srgbClr val="A4B8C9"/>
@@ -21364,6 +21432,7 @@
               <a:spcAft>
                 <a:spcPts val="0"/>
               </a:spcAft>
+              <a:buNone/>
               <a:defRPr sz="2250" b="1">
                 <a:solidFill>
                   <a:srgbClr val="F4F8FB"/>
@@ -21428,6 +21497,7 @@
               <a:spcAft>
                 <a:spcPts val="0"/>
               </a:spcAft>
+              <a:buNone/>
               <a:defRPr sz="1875" b="0">
                 <a:solidFill>
                   <a:srgbClr val="A4B8C9"/>
@@ -21554,6 +21624,7 @@
               <a:spcAft>
                 <a:spcPts val="0"/>
               </a:spcAft>
+              <a:buNone/>
               <a:defRPr sz="2250" b="1">
                 <a:solidFill>
                   <a:srgbClr val="F4F8FB"/>
@@ -21618,6 +21689,7 @@
               <a:spcAft>
                 <a:spcPts val="0"/>
               </a:spcAft>
+              <a:buNone/>
               <a:defRPr sz="1875" b="0">
                 <a:solidFill>
                   <a:srgbClr val="A4B8C9"/>
@@ -21783,6 +21855,7 @@
               <a:spcAft>
                 <a:spcPts val="0"/>
               </a:spcAft>
+              <a:buNone/>
               <a:defRPr sz="1125" b="1">
                 <a:solidFill>
                   <a:srgbClr val="A4B8C9"/>
@@ -21847,6 +21920,7 @@
               <a:spcAft>
                 <a:spcPts val="0"/>
               </a:spcAft>
+              <a:buNone/>
               <a:defRPr sz="1275" b="0">
                 <a:solidFill>
                   <a:srgbClr val="A4B8C9"/>
@@ -21911,6 +21985,7 @@
               <a:spcAft>
                 <a:spcPts val="0"/>
               </a:spcAft>
+              <a:buNone/>
               <a:defRPr sz="1350" b="1">
                 <a:solidFill>
                   <a:srgbClr val="54D7FF"/>
@@ -21929,7 +22004,7 @@
                 <a:ea typeface="Arial"/>
                 <a:cs typeface="Arial"/>
               </a:rPr>
-              <a:t>ПОЧЕМУ НЕ РЕШИТЬ ЭТО ОДНИМ МЕСТОМ</a:t>
+              <a:t>ОРГАНИЗАЦИЯ ЗНАНИЙ</a:t>
             </a:r>
           </a:p>
         </p:txBody>
@@ -21993,7 +22068,7 @@
                 <a:ea typeface="Arial"/>
                 <a:cs typeface="Arial"/>
               </a:rPr>
-              <a:t>Сложить всё в один репозиторий —</a:t>
+              <a:t>Ограничения централизованного</a:t>
             </a:r>
           </a:p>
           <a:p xmlns:a="http://schemas.openxmlformats.org/drawingml/2006/main">
@@ -22022,7 +22097,7 @@
                 <a:ea typeface="Arial"/>
                 <a:cs typeface="Arial"/>
               </a:rPr>
-              <a:t>значит создать ещё одну очередь.</a:t>
+              <a:t>ведения знаний</a:t>
             </a:r>
           </a:p>
         </p:txBody>
@@ -22173,6 +22248,7 @@
               <a:spcAft>
                 <a:spcPts val="0"/>
               </a:spcAft>
+              <a:buNone/>
               <a:defRPr sz="2925" b="1">
                 <a:solidFill>
                   <a:srgbClr val="FF7C8B"/>
@@ -22237,6 +22313,7 @@
               <a:spcAft>
                 <a:spcPts val="0"/>
               </a:spcAft>
+              <a:buNone/>
               <a:defRPr sz="1875" b="0">
                 <a:solidFill>
                   <a:srgbClr val="A4B8C9"/>
@@ -22266,6 +22343,7 @@
               <a:spcAft>
                 <a:spcPts val="0"/>
               </a:spcAft>
+              <a:buNone/>
               <a:defRPr sz="1875" b="0">
                 <a:solidFill>
                   <a:srgbClr val="A4B8C9"/>
@@ -22295,6 +22373,7 @@
               <a:spcAft>
                 <a:spcPts val="0"/>
               </a:spcAft>
+              <a:buNone/>
               <a:defRPr sz="1875" b="0">
                 <a:solidFill>
                   <a:srgbClr val="A4B8C9"/>
@@ -22313,6 +22392,7 @@
               <a:spcAft>
                 <a:spcPts val="0"/>
               </a:spcAft>
+              <a:buNone/>
               <a:defRPr sz="1875" b="0">
                 <a:solidFill>
                   <a:srgbClr val="A4B8C9"/>
@@ -22342,6 +22422,7 @@
               <a:spcAft>
                 <a:spcPts val="0"/>
               </a:spcAft>
+              <a:buNone/>
               <a:defRPr sz="1875" b="0">
                 <a:solidFill>
                   <a:srgbClr val="A4B8C9"/>
@@ -22371,6 +22452,7 @@
               <a:spcAft>
                 <a:spcPts val="0"/>
               </a:spcAft>
+              <a:buNone/>
               <a:defRPr sz="1875" b="0">
                 <a:solidFill>
                   <a:srgbClr val="A4B8C9"/>
@@ -22389,6 +22471,7 @@
               <a:spcAft>
                 <a:spcPts val="0"/>
               </a:spcAft>
+              <a:buNone/>
               <a:defRPr sz="1875" b="0">
                 <a:solidFill>
                   <a:srgbClr val="A4B8C9"/>
@@ -22418,6 +22501,7 @@
               <a:spcAft>
                 <a:spcPts val="0"/>
               </a:spcAft>
+              <a:buNone/>
               <a:defRPr sz="1875" b="0">
                 <a:solidFill>
                   <a:srgbClr val="A4B8C9"/>
@@ -22556,6 +22640,7 @@
               <a:spcAft>
                 <a:spcPts val="0"/>
               </a:spcAft>
+              <a:buNone/>
               <a:defRPr sz="2925" b="1">
                 <a:solidFill>
                   <a:srgbClr val="5CE3A0"/>
@@ -22620,6 +22705,7 @@
               <a:spcAft>
                 <a:spcPts val="0"/>
               </a:spcAft>
+              <a:buNone/>
               <a:defRPr sz="1875" b="0">
                 <a:solidFill>
                   <a:srgbClr val="A4B8C9"/>
@@ -22649,6 +22735,7 @@
               <a:spcAft>
                 <a:spcPts val="0"/>
               </a:spcAft>
+              <a:buNone/>
               <a:defRPr sz="1875" b="0">
                 <a:solidFill>
                   <a:srgbClr val="A4B8C9"/>
@@ -22678,6 +22765,7 @@
               <a:spcAft>
                 <a:spcPts val="0"/>
               </a:spcAft>
+              <a:buNone/>
               <a:defRPr sz="1875" b="0">
                 <a:solidFill>
                   <a:srgbClr val="A4B8C9"/>
@@ -22696,6 +22784,7 @@
               <a:spcAft>
                 <a:spcPts val="0"/>
               </a:spcAft>
+              <a:buNone/>
               <a:defRPr sz="1875" b="0">
                 <a:solidFill>
                   <a:srgbClr val="A4B8C9"/>
@@ -22725,6 +22814,7 @@
               <a:spcAft>
                 <a:spcPts val="0"/>
               </a:spcAft>
+              <a:buNone/>
               <a:defRPr sz="1875" b="0">
                 <a:solidFill>
                   <a:srgbClr val="A4B8C9"/>
@@ -22754,6 +22844,7 @@
               <a:spcAft>
                 <a:spcPts val="0"/>
               </a:spcAft>
+              <a:buNone/>
               <a:defRPr sz="1875" b="0">
                 <a:solidFill>
                   <a:srgbClr val="A4B8C9"/>
@@ -22772,6 +22863,7 @@
               <a:spcAft>
                 <a:spcPts val="0"/>
               </a:spcAft>
+              <a:buNone/>
               <a:defRPr sz="1875" b="0">
                 <a:solidFill>
                   <a:srgbClr val="A4B8C9"/>
@@ -22801,6 +22893,7 @@
               <a:spcAft>
                 <a:spcPts val="0"/>
               </a:spcAft>
+              <a:buNone/>
               <a:defRPr sz="1875" b="0">
                 <a:solidFill>
                   <a:srgbClr val="A4B8C9"/>
@@ -22966,6 +23059,7 @@
               <a:spcAft>
                 <a:spcPts val="0"/>
               </a:spcAft>
+              <a:buNone/>
               <a:defRPr sz="1125" b="1">
                 <a:solidFill>
                   <a:srgbClr val="A4B8C9"/>
@@ -23030,6 +23124,7 @@
               <a:spcAft>
                 <a:spcPts val="0"/>
               </a:spcAft>
+              <a:buNone/>
               <a:defRPr sz="1275" b="0">
                 <a:solidFill>
                   <a:srgbClr val="A4B8C9"/>
@@ -23094,6 +23189,7 @@
               <a:spcAft>
                 <a:spcPts val="0"/>
               </a:spcAft>
+              <a:buNone/>
               <a:defRPr sz="1350" b="1">
                 <a:solidFill>
                   <a:srgbClr val="54D7FF"/>
@@ -23112,7 +23208,7 @@
                 <a:ea typeface="Arial"/>
                 <a:cs typeface="Arial"/>
               </a:rPr>
-              <a:t>С ЧЕГО НАЧАЛИ</a:t>
+              <a:t>АНАЛИЗ ТЕКУЩЕГО ПРОЦЕССА</a:t>
             </a:r>
           </a:p>
         </p:txBody>
@@ -23176,7 +23272,7 @@
                 <a:ea typeface="Arial"/>
                 <a:cs typeface="Arial"/>
               </a:rPr>
-              <a:t>Сначала посмотрели, как ответ</a:t>
+              <a:t>Анализ источников знаний</a:t>
             </a:r>
           </a:p>
           <a:p xmlns:a="http://schemas.openxmlformats.org/drawingml/2006/main">
@@ -23205,7 +23301,7 @@
                 <a:ea typeface="Arial"/>
                 <a:cs typeface="Arial"/>
               </a:rPr>
-              <a:t>ищут на самом деле.</a:t>
+              <a:t>и процесса поиска информации</a:t>
             </a:r>
           </a:p>
         </p:txBody>
@@ -23282,6 +23378,7 @@
               <a:spcAft>
                 <a:spcPts val="0"/>
               </a:spcAft>
+              <a:buNone/>
               <a:defRPr sz="2475" b="1">
                 <a:solidFill>
                   <a:srgbClr val="F4F8FB"/>
@@ -23346,6 +23443,7 @@
               <a:spcAft>
                 <a:spcPts val="0"/>
               </a:spcAft>
+              <a:buNone/>
               <a:defRPr sz="1950" b="0">
                 <a:solidFill>
                   <a:srgbClr val="A4B8C9"/>
@@ -23441,6 +23539,7 @@
               <a:spcAft>
                 <a:spcPts val="0"/>
               </a:spcAft>
+              <a:buNone/>
               <a:defRPr sz="2475" b="1">
                 <a:solidFill>
                   <a:srgbClr val="F4F8FB"/>
@@ -23505,6 +23604,7 @@
               <a:spcAft>
                 <a:spcPts val="0"/>
               </a:spcAft>
+              <a:buNone/>
               <a:defRPr sz="1950" b="0">
                 <a:solidFill>
                   <a:srgbClr val="A4B8C9"/>
@@ -23600,6 +23700,7 @@
               <a:spcAft>
                 <a:spcPts val="0"/>
               </a:spcAft>
+              <a:buNone/>
               <a:defRPr sz="2475" b="1">
                 <a:solidFill>
                   <a:srgbClr val="F4F8FB"/>
@@ -23664,6 +23765,7 @@
               <a:spcAft>
                 <a:spcPts val="0"/>
               </a:spcAft>
+              <a:buNone/>
               <a:defRPr sz="1950" b="0">
                 <a:solidFill>
                   <a:srgbClr val="A4B8C9"/>
@@ -23728,6 +23830,7 @@
               <a:spcAft>
                 <a:spcPts val="0"/>
               </a:spcAft>
+              <a:buNone/>
               <a:defRPr sz="2550" b="0">
                 <a:solidFill>
                   <a:srgbClr val="F4F8FB"/>
@@ -23904,6 +24007,7 @@
               <a:spcAft>
                 <a:spcPts val="0"/>
               </a:spcAft>
+              <a:buNone/>
               <a:defRPr sz="1125" b="1">
                 <a:solidFill>
                   <a:srgbClr val="A4B8C9"/>
@@ -23968,6 +24072,7 @@
               <a:spcAft>
                 <a:spcPts val="0"/>
               </a:spcAft>
+              <a:buNone/>
               <a:defRPr sz="1275" b="0">
                 <a:solidFill>
                   <a:srgbClr val="A4B8C9"/>
@@ -24032,6 +24137,7 @@
               <a:spcAft>
                 <a:spcPts val="0"/>
               </a:spcAft>
+              <a:buNone/>
               <a:defRPr sz="1350" b="1">
                 <a:solidFill>
                   <a:srgbClr val="54D7FF"/>
@@ -24050,7 +24156,7 @@
                 <a:ea typeface="Arial"/>
                 <a:cs typeface="Arial"/>
               </a:rPr>
-              <a:t>ЧТО ДОБАВЛЯЕМ В СИСТЕМУ</a:t>
+              <a:t>АРХИТЕКТУРНЫЙ ПОДХОД</a:t>
             </a:r>
           </a:p>
         </p:txBody>
@@ -24114,7 +24220,7 @@
                 <a:ea typeface="Arial"/>
                 <a:cs typeface="Arial"/>
               </a:rPr>
-              <a:t>Не переносим знания в центр.</a:t>
+              <a:t>Единый доступ</a:t>
             </a:r>
           </a:p>
           <a:p xmlns:a="http://schemas.openxmlformats.org/drawingml/2006/main">
@@ -24143,7 +24249,7 @@
                 <a:ea typeface="Arial"/>
                 <a:cs typeface="Arial"/>
               </a:rPr>
-              <a:t>Строим единый путь к источникам.</a:t>
+              <a:t>к распределённым источникам знаний</a:t>
             </a:r>
           </a:p>
         </p:txBody>
@@ -24294,6 +24400,7 @@
               <a:spcAft>
                 <a:spcPts val="0"/>
               </a:spcAft>
+              <a:buNone/>
               <a:defRPr sz="2925" b="1">
                 <a:solidFill>
                   <a:srgbClr val="FF7C8B"/>
@@ -24358,6 +24465,7 @@
               <a:spcAft>
                 <a:spcPts val="0"/>
               </a:spcAft>
+              <a:buNone/>
               <a:defRPr sz="1875" b="0">
                 <a:solidFill>
                   <a:srgbClr val="A4B8C9"/>
@@ -24387,6 +24495,7 @@
               <a:spcAft>
                 <a:spcPts val="0"/>
               </a:spcAft>
+              <a:buNone/>
               <a:defRPr sz="1875" b="0">
                 <a:solidFill>
                   <a:srgbClr val="A4B8C9"/>
@@ -24416,6 +24525,7 @@
               <a:spcAft>
                 <a:spcPts val="0"/>
               </a:spcAft>
+              <a:buNone/>
               <a:defRPr sz="1875" b="0">
                 <a:solidFill>
                   <a:srgbClr val="A4B8C9"/>
@@ -24434,6 +24544,7 @@
               <a:spcAft>
                 <a:spcPts val="0"/>
               </a:spcAft>
+              <a:buNone/>
               <a:defRPr sz="1875" b="0">
                 <a:solidFill>
                   <a:srgbClr val="A4B8C9"/>
@@ -24463,6 +24574,7 @@
               <a:spcAft>
                 <a:spcPts val="0"/>
               </a:spcAft>
+              <a:buNone/>
               <a:defRPr sz="1875" b="0">
                 <a:solidFill>
                   <a:srgbClr val="A4B8C9"/>
@@ -24492,6 +24604,7 @@
               <a:spcAft>
                 <a:spcPts val="0"/>
               </a:spcAft>
+              <a:buNone/>
               <a:defRPr sz="1875" b="0">
                 <a:solidFill>
                   <a:srgbClr val="A4B8C9"/>
@@ -24510,6 +24623,7 @@
               <a:spcAft>
                 <a:spcPts val="0"/>
               </a:spcAft>
+              <a:buNone/>
               <a:defRPr sz="1875" b="0">
                 <a:solidFill>
                   <a:srgbClr val="A4B8C9"/>
@@ -24539,6 +24653,7 @@
               <a:spcAft>
                 <a:spcPts val="0"/>
               </a:spcAft>
+              <a:buNone/>
               <a:defRPr sz="1875" b="0">
                 <a:solidFill>
                   <a:srgbClr val="A4B8C9"/>
@@ -24677,6 +24792,7 @@
               <a:spcAft>
                 <a:spcPts val="0"/>
               </a:spcAft>
+              <a:buNone/>
               <a:defRPr sz="2925" b="1">
                 <a:solidFill>
                   <a:srgbClr val="5CE3A0"/>
@@ -24741,6 +24857,7 @@
               <a:spcAft>
                 <a:spcPts val="0"/>
               </a:spcAft>
+              <a:buNone/>
               <a:defRPr sz="1875" b="0">
                 <a:solidFill>
                   <a:srgbClr val="A4B8C9"/>
@@ -24770,6 +24887,7 @@
               <a:spcAft>
                 <a:spcPts val="0"/>
               </a:spcAft>
+              <a:buNone/>
               <a:defRPr sz="1875" b="0">
                 <a:solidFill>
                   <a:srgbClr val="A4B8C9"/>
@@ -24799,6 +24917,7 @@
               <a:spcAft>
                 <a:spcPts val="0"/>
               </a:spcAft>
+              <a:buNone/>
               <a:defRPr sz="1875" b="0">
                 <a:solidFill>
                   <a:srgbClr val="A4B8C9"/>
@@ -24817,6 +24936,7 @@
               <a:spcAft>
                 <a:spcPts val="0"/>
               </a:spcAft>
+              <a:buNone/>
               <a:defRPr sz="1875" b="0">
                 <a:solidFill>
                   <a:srgbClr val="A4B8C9"/>
@@ -24846,6 +24966,7 @@
               <a:spcAft>
                 <a:spcPts val="0"/>
               </a:spcAft>
+              <a:buNone/>
               <a:defRPr sz="1875" b="0">
                 <a:solidFill>
                   <a:srgbClr val="A4B8C9"/>
@@ -24875,6 +24996,7 @@
               <a:spcAft>
                 <a:spcPts val="0"/>
               </a:spcAft>
+              <a:buNone/>
               <a:defRPr sz="1875" b="0">
                 <a:solidFill>
                   <a:srgbClr val="A4B8C9"/>
@@ -24893,6 +25015,7 @@
               <a:spcAft>
                 <a:spcPts val="0"/>
               </a:spcAft>
+              <a:buNone/>
               <a:defRPr sz="1875" b="0">
                 <a:solidFill>
                   <a:srgbClr val="A4B8C9"/>
@@ -24922,6 +25045,7 @@
               <a:spcAft>
                 <a:spcPts val="0"/>
               </a:spcAft>
+              <a:buNone/>
               <a:defRPr sz="1875" b="0">
                 <a:solidFill>
                   <a:srgbClr val="A4B8C9"/>
@@ -25087,6 +25211,7 @@
               <a:spcAft>
                 <a:spcPts val="0"/>
               </a:spcAft>
+              <a:buNone/>
               <a:defRPr sz="1125" b="1">
                 <a:solidFill>
                   <a:srgbClr val="A4B8C9"/>
@@ -25151,6 +25276,7 @@
               <a:spcAft>
                 <a:spcPts val="0"/>
               </a:spcAft>
+              <a:buNone/>
               <a:defRPr sz="1275" b="0">
                 <a:solidFill>
                   <a:srgbClr val="A4B8C9"/>
@@ -25215,6 +25341,7 @@
               <a:spcAft>
                 <a:spcPts val="0"/>
               </a:spcAft>
+              <a:buNone/>
               <a:defRPr sz="1350" b="1">
                 <a:solidFill>
                   <a:srgbClr val="54D7FF"/>
@@ -25233,7 +25360,7 @@
                 <a:ea typeface="Arial"/>
                 <a:cs typeface="Arial"/>
               </a:rPr>
-              <a:t>КАК СТРОИТСЯ RAG</a:t>
+              <a:t>ИНДЕКСАЦИЯ ИСТОЧНИКОВ</a:t>
             </a:r>
           </a:p>
         </p:txBody>
@@ -25297,7 +25424,7 @@
                 <a:ea typeface="Arial"/>
                 <a:cs typeface="Arial"/>
               </a:rPr>
-              <a:t>RAG собирается из источников,</a:t>
+              <a:t>Подготовка источников</a:t>
             </a:r>
           </a:p>
           <a:p xmlns:a="http://schemas.openxmlformats.org/drawingml/2006/main">
@@ -25320,24 +25447,13 @@
             <a:r>
               <a:rPr sz="4050" b="1">
                 <a:solidFill>
-                  <a:srgbClr val="F4F8FB"/>
-                </a:solidFill>
-                <a:latin typeface="Arial"/>
-                <a:ea typeface="Arial"/>
-                <a:cs typeface="Arial"/>
-              </a:rPr>
-              <a:t>которые команды </a:t>
-            </a:r>
-            <a:r>
-              <a:rPr sz="4050" b="1">
-                <a:solidFill>
                   <a:srgbClr val="54D7FF"/>
                 </a:solidFill>
                 <a:latin typeface="Arial"/>
                 <a:ea typeface="Arial"/>
                 <a:cs typeface="Arial"/>
               </a:rPr>
-              <a:t>уже ведут.</a:t>
+              <a:t>и построение RAG-индекса</a:t>
             </a:r>
           </a:p>
         </p:txBody>
@@ -25573,6 +25689,7 @@
               <a:spcAft>
                 <a:spcPts val="0"/>
               </a:spcAft>
+              <a:buNone/>
               <a:defRPr sz="2175" b="1">
                 <a:solidFill>
                   <a:srgbClr val="F4F8FB"/>
@@ -25602,6 +25719,7 @@
               <a:spcAft>
                 <a:spcPts val="0"/>
               </a:spcAft>
+              <a:buNone/>
               <a:defRPr sz="2175" b="1">
                 <a:solidFill>
                   <a:srgbClr val="F4F8FB"/>
@@ -25666,6 +25784,7 @@
               <a:spcAft>
                 <a:spcPts val="0"/>
               </a:spcAft>
+              <a:buNone/>
               <a:defRPr sz="1650" b="0">
                 <a:solidFill>
                   <a:srgbClr val="A4B8C9"/>
@@ -25796,6 +25915,7 @@
               <a:spcAft>
                 <a:spcPts val="0"/>
               </a:spcAft>
+              <a:buNone/>
               <a:defRPr sz="2175" b="1">
                 <a:solidFill>
                   <a:srgbClr val="F4F8FB"/>
@@ -25860,6 +25980,7 @@
               <a:spcAft>
                 <a:spcPts val="0"/>
               </a:spcAft>
+              <a:buNone/>
               <a:defRPr sz="1650" b="0">
                 <a:solidFill>
                   <a:srgbClr val="A4B8C9"/>
@@ -25990,6 +26111,7 @@
               <a:spcAft>
                 <a:spcPts val="0"/>
               </a:spcAft>
+              <a:buNone/>
               <a:defRPr sz="2175" b="1">
                 <a:solidFill>
                   <a:srgbClr val="F4F8FB"/>
@@ -26019,6 +26141,7 @@
               <a:spcAft>
                 <a:spcPts val="0"/>
               </a:spcAft>
+              <a:buNone/>
               <a:defRPr sz="2175" b="1">
                 <a:solidFill>
                   <a:srgbClr val="F4F8FB"/>
@@ -26083,6 +26206,7 @@
               <a:spcAft>
                 <a:spcPts val="0"/>
               </a:spcAft>
+              <a:buNone/>
               <a:defRPr sz="1650" b="0">
                 <a:solidFill>
                   <a:srgbClr val="A4B8C9"/>
@@ -26213,6 +26337,7 @@
               <a:spcAft>
                 <a:spcPts val="0"/>
               </a:spcAft>
+              <a:buNone/>
               <a:defRPr sz="2175" b="1">
                 <a:solidFill>
                   <a:srgbClr val="F4F8FB"/>
@@ -26277,6 +26402,7 @@
               <a:spcAft>
                 <a:spcPts val="0"/>
               </a:spcAft>
+              <a:buNone/>
               <a:defRPr sz="1650" b="0">
                 <a:solidFill>
                   <a:srgbClr val="A4B8C9"/>
@@ -26407,6 +26533,7 @@
               <a:spcAft>
                 <a:spcPts val="0"/>
               </a:spcAft>
+              <a:buNone/>
               <a:defRPr sz="2175" b="1">
                 <a:solidFill>
                   <a:srgbClr val="F4F8FB"/>
@@ -26436,6 +26563,7 @@
               <a:spcAft>
                 <a:spcPts val="0"/>
               </a:spcAft>
+              <a:buNone/>
               <a:defRPr sz="2175" b="1">
                 <a:solidFill>
                   <a:srgbClr val="F4F8FB"/>
@@ -26500,6 +26628,7 @@
               <a:spcAft>
                 <a:spcPts val="0"/>
               </a:spcAft>
+              <a:buNone/>
               <a:defRPr sz="1650" b="0">
                 <a:solidFill>
                   <a:srgbClr val="A4B8C9"/>
@@ -26595,6 +26724,7 @@
               <a:spcAft>
                 <a:spcPts val="0"/>
               </a:spcAft>
+              <a:buNone/>
               <a:defRPr sz="1800" b="0">
                 <a:solidFill>
                   <a:srgbClr val="A4B8C9"/>
@@ -26771,6 +26901,7 @@
               <a:spcAft>
                 <a:spcPts val="0"/>
               </a:spcAft>
+              <a:buNone/>
               <a:defRPr sz="1125" b="1">
                 <a:solidFill>
                   <a:srgbClr val="A4B8C9"/>
@@ -26835,6 +26966,7 @@
               <a:spcAft>
                 <a:spcPts val="0"/>
               </a:spcAft>
+              <a:buNone/>
               <a:defRPr sz="1275" b="0">
                 <a:solidFill>
                   <a:srgbClr val="A4B8C9"/>
@@ -26899,6 +27031,7 @@
               <a:spcAft>
                 <a:spcPts val="0"/>
               </a:spcAft>
+              <a:buNone/>
               <a:defRPr sz="1350" b="1">
                 <a:solidFill>
                   <a:srgbClr val="54D7FF"/>
@@ -26917,7 +27050,7 @@
                 <a:ea typeface="Arial"/>
                 <a:cs typeface="Arial"/>
               </a:rPr>
-              <a:t>ЧТО ИМЕННО ХЕШИРУЕТСЯ</a:t>
+              <a:t>МЕХАНИЗМЫ ХЕШИРОВАНИЯ</a:t>
             </a:r>
           </a:p>
         </p:txBody>
@@ -26981,8 +27114,26 @@
                 <a:ea typeface="Arial"/>
                 <a:cs typeface="Arial"/>
               </a:rPr>
-              <a:t>Хеши в RAG нужны </a:t>
-            </a:r>
+              <a:t>Хеширование при индексации</a:t>
+            </a:r>
+          </a:p>
+          <a:p xmlns:a="http://schemas.openxmlformats.org/drawingml/2006/main">
+            <a:pPr algn="l">
+              <a:spcBef>
+                <a:spcPts val="0"/>
+              </a:spcBef>
+              <a:spcAft>
+                <a:spcPts val="0"/>
+              </a:spcAft>
+              <a:defRPr sz="4050" b="1">
+                <a:solidFill>
+                  <a:srgbClr val="F4F8FB"/>
+                </a:solidFill>
+                <a:latin typeface="Arial"/>
+                <a:ea typeface="Arial"/>
+                <a:cs typeface="Arial"/>
+              </a:defRPr>
+            </a:pPr>
             <a:r>
               <a:rPr sz="4050" b="1">
                 <a:solidFill>
@@ -26992,7 +27143,7 @@
                 <a:ea typeface="Arial"/>
                 <a:cs typeface="Arial"/>
               </a:rPr>
-              <a:t>в двух разных местах.</a:t>
+              <a:t>и лексическом поиске</a:t>
             </a:r>
           </a:p>
         </p:txBody>
@@ -27069,6 +27220,7 @@
               <a:spcAft>
                 <a:spcPts val="0"/>
               </a:spcAft>
+              <a:buNone/>
               <a:defRPr sz="2850" b="1">
                 <a:solidFill>
                   <a:srgbClr val="54D7FF"/>
@@ -27133,6 +27285,7 @@
               <a:spcAft>
                 <a:spcPts val="0"/>
               </a:spcAft>
+              <a:buNone/>
               <a:defRPr sz="1950" b="0">
                 <a:solidFill>
                   <a:srgbClr val="54D7FF"/>
@@ -27197,6 +27350,7 @@
               <a:spcAft>
                 <a:spcPts val="0"/>
               </a:spcAft>
+              <a:buNone/>
               <a:defRPr sz="1950" b="0">
                 <a:solidFill>
                   <a:srgbClr val="A4B8C9"/>
@@ -27261,6 +27415,7 @@
               <a:spcAft>
                 <a:spcPts val="0"/>
               </a:spcAft>
+              <a:buNone/>
               <a:defRPr sz="1950" b="0">
                 <a:solidFill>
                   <a:srgbClr val="54D7FF"/>
@@ -27325,6 +27480,7 @@
               <a:spcAft>
                 <a:spcPts val="0"/>
               </a:spcAft>
+              <a:buNone/>
               <a:defRPr sz="1950" b="0">
                 <a:solidFill>
                   <a:srgbClr val="A4B8C9"/>
@@ -27389,6 +27545,7 @@
               <a:spcAft>
                 <a:spcPts val="0"/>
               </a:spcAft>
+              <a:buNone/>
               <a:defRPr sz="1950" b="0">
                 <a:solidFill>
                   <a:srgbClr val="54D7FF"/>
@@ -27453,6 +27610,7 @@
               <a:spcAft>
                 <a:spcPts val="0"/>
               </a:spcAft>
+              <a:buNone/>
               <a:defRPr sz="1950" b="0">
                 <a:solidFill>
                   <a:srgbClr val="A4B8C9"/>
@@ -27548,6 +27706,7 @@
               <a:spcAft>
                 <a:spcPts val="0"/>
               </a:spcAft>
+              <a:buNone/>
               <a:defRPr sz="2850" b="1">
                 <a:solidFill>
                   <a:srgbClr val="5CE3A0"/>
@@ -27612,6 +27771,7 @@
               <a:spcAft>
                 <a:spcPts val="0"/>
               </a:spcAft>
+              <a:buNone/>
               <a:defRPr sz="1950" b="0">
                 <a:solidFill>
                   <a:srgbClr val="5CE3A0"/>
@@ -27676,6 +27836,7 @@
               <a:spcAft>
                 <a:spcPts val="0"/>
               </a:spcAft>
+              <a:buNone/>
               <a:defRPr sz="1950" b="0">
                 <a:solidFill>
                   <a:srgbClr val="A4B8C9"/>
@@ -27740,6 +27901,7 @@
               <a:spcAft>
                 <a:spcPts val="0"/>
               </a:spcAft>
+              <a:buNone/>
               <a:defRPr sz="1950" b="0">
                 <a:solidFill>
                   <a:srgbClr val="5CE3A0"/>
@@ -27804,6 +27966,7 @@
               <a:spcAft>
                 <a:spcPts val="0"/>
               </a:spcAft>
+              <a:buNone/>
               <a:defRPr sz="1950" b="0">
                 <a:solidFill>
                   <a:srgbClr val="A4B8C9"/>
@@ -27868,6 +28031,7 @@
               <a:spcAft>
                 <a:spcPts val="0"/>
               </a:spcAft>
+              <a:buNone/>
               <a:defRPr sz="1950" b="0">
                 <a:solidFill>
                   <a:srgbClr val="5CE3A0"/>
@@ -27932,6 +28096,7 @@
               <a:spcAft>
                 <a:spcPts val="0"/>
               </a:spcAft>
+              <a:buNone/>
               <a:defRPr sz="1950" b="0">
                 <a:solidFill>
                   <a:srgbClr val="A4B8C9"/>
@@ -28027,6 +28192,7 @@
               <a:spcAft>
                 <a:spcPts val="0"/>
               </a:spcAft>
+              <a:buNone/>
               <a:defRPr sz="1800" b="0">
                 <a:solidFill>
                   <a:srgbClr val="A4B8C9"/>
@@ -28203,6 +28369,7 @@
               <a:spcAft>
                 <a:spcPts val="0"/>
               </a:spcAft>
+              <a:buNone/>
               <a:defRPr sz="1125" b="1">
                 <a:solidFill>
                   <a:srgbClr val="A4B8C9"/>
@@ -28267,6 +28434,7 @@
               <a:spcAft>
                 <a:spcPts val="0"/>
               </a:spcAft>
+              <a:buNone/>
               <a:defRPr sz="1275" b="0">
                 <a:solidFill>
                   <a:srgbClr val="A4B8C9"/>
@@ -28331,6 +28499,7 @@
               <a:spcAft>
                 <a:spcPts val="0"/>
               </a:spcAft>
+              <a:buNone/>
               <a:defRPr sz="1350" b="1">
                 <a:solidFill>
                   <a:srgbClr val="54D7FF"/>
@@ -28349,7 +28518,7 @@
                 <a:ea typeface="Arial"/>
                 <a:cs typeface="Arial"/>
               </a:rPr>
-              <a:t>ДВА РЕЖИМА ЭМБЕДДИНГОВ</a:t>
+              <a:t>ЛОКАЛЬНАЯ ВЕКТОРИЗАЦИЯ</a:t>
             </a:r>
           </a:p>
         </p:txBody>
@@ -28413,7 +28582,7 @@
                 <a:ea typeface="Arial"/>
                 <a:cs typeface="Arial"/>
               </a:rPr>
-              <a:t>Видеокарта ускоряет semantic-поиск,</a:t>
+              <a:t>Режимы векторизации</a:t>
             </a:r>
           </a:p>
           <a:p xmlns:a="http://schemas.openxmlformats.org/drawingml/2006/main">
@@ -28436,24 +28605,13 @@
             <a:r>
               <a:rPr sz="4050" b="1">
                 <a:solidFill>
-                  <a:srgbClr val="F4F8FB"/>
-                </a:solidFill>
-                <a:latin typeface="Arial"/>
-                <a:ea typeface="Arial"/>
-                <a:cs typeface="Arial"/>
-              </a:rPr>
-              <a:t>но </a:t>
-            </a:r>
-            <a:r>
-              <a:rPr sz="4050" b="1">
-                <a:solidFill>
                   <a:srgbClr val="5CE3A0"/>
                 </a:solidFill>
                 <a:latin typeface="Arial"/>
                 <a:ea typeface="Arial"/>
                 <a:cs typeface="Arial"/>
               </a:rPr>
-              <a:t>не является обязательной.</a:t>
+              <a:t>и требования к вычислительным ресурсам</a:t>
             </a:r>
           </a:p>
         </p:txBody>
@@ -28530,6 +28688,7 @@
               <a:spcAft>
                 <a:spcPts val="0"/>
               </a:spcAft>
+              <a:buNone/>
               <a:defRPr sz="2475" b="1">
                 <a:solidFill>
                   <a:srgbClr val="F4F8FB"/>
@@ -28594,6 +28753,7 @@
               <a:spcAft>
                 <a:spcPts val="0"/>
               </a:spcAft>
+              <a:buNone/>
               <a:defRPr sz="1950" b="0">
                 <a:solidFill>
                   <a:srgbClr val="A4B8C9"/>
@@ -28689,6 +28849,7 @@
               <a:spcAft>
                 <a:spcPts val="0"/>
               </a:spcAft>
+              <a:buNone/>
               <a:defRPr sz="2475" b="1">
                 <a:solidFill>
                   <a:srgbClr val="F4F8FB"/>
@@ -28753,6 +28914,7 @@
               <a:spcAft>
                 <a:spcPts val="0"/>
               </a:spcAft>
+              <a:buNone/>
               <a:defRPr sz="1950" b="0">
                 <a:solidFill>
                   <a:srgbClr val="A4B8C9"/>
@@ -28848,6 +29010,7 @@
               <a:spcAft>
                 <a:spcPts val="0"/>
               </a:spcAft>
+              <a:buNone/>
               <a:defRPr sz="2475" b="1">
                 <a:solidFill>
                   <a:srgbClr val="F4F8FB"/>
@@ -28912,6 +29075,7 @@
               <a:spcAft>
                 <a:spcPts val="0"/>
               </a:spcAft>
+              <a:buNone/>
               <a:defRPr sz="1950" b="0">
                 <a:solidFill>
                   <a:srgbClr val="A4B8C9"/>
@@ -29007,6 +29171,7 @@
               <a:spcAft>
                 <a:spcPts val="0"/>
               </a:spcAft>
+              <a:buNone/>
               <a:defRPr sz="1800" b="0">
                 <a:solidFill>
                   <a:srgbClr val="A4B8C9"/>
